--- a/public/videos/repositories/miseoshi-web/miseoshi-web-tech-preview.pptx
+++ b/public/videos/repositories/miseoshi-web/miseoshi-web-tech-preview.pptx
@@ -134,7 +134,7 @@
           <p:cNvPr id="2" name="タイトル 1">
             <a:extLst>
               <a:ext uri="{FF2B5EF4-FFF2-40B4-BE49-F238E27FC236}">
-                <a16:creationId xmlns:a16="http://schemas.microsoft.com/office/drawing/2014/main" id="{2D1D0AAD-A770-EB3B-9E5F-25CBB543E9BD}"/>
+                <a16:creationId xmlns:a16="http://schemas.microsoft.com/office/drawing/2014/main" id="{95F050A2-44CA-E62F-CDFF-6251ECA22464}"/>
               </a:ext>
             </a:extLst>
           </p:cNvPr>
@@ -171,7 +171,7 @@
           <p:cNvPr id="3" name="字幕 2">
             <a:extLst>
               <a:ext uri="{FF2B5EF4-FFF2-40B4-BE49-F238E27FC236}">
-                <a16:creationId xmlns:a16="http://schemas.microsoft.com/office/drawing/2014/main" id="{BB22B1EE-2DA0-77C6-B0FC-24A9B5AD0542}"/>
+                <a16:creationId xmlns:a16="http://schemas.microsoft.com/office/drawing/2014/main" id="{560BF138-F8A4-42C1-ACFD-95EEB6D3F121}"/>
               </a:ext>
             </a:extLst>
           </p:cNvPr>
@@ -241,7 +241,7 @@
           <p:cNvPr id="4" name="日付プレースホルダー 3">
             <a:extLst>
               <a:ext uri="{FF2B5EF4-FFF2-40B4-BE49-F238E27FC236}">
-                <a16:creationId xmlns:a16="http://schemas.microsoft.com/office/drawing/2014/main" id="{FE9271C4-6C66-0F22-028F-95AC694324EE}"/>
+                <a16:creationId xmlns:a16="http://schemas.microsoft.com/office/drawing/2014/main" id="{40F847AF-7227-D1C9-8FB6-E13C58133A26}"/>
               </a:ext>
             </a:extLst>
           </p:cNvPr>
@@ -257,7 +257,7 @@
           <a:bodyPr/>
           <a:lstStyle/>
           <a:p>
-            <a:fld id="{9D890F3C-5D16-401D-9938-A42744898A22}" type="datetimeFigureOut">
+            <a:fld id="{4B28C2A7-CA13-47F5-B31F-225FA1F55699}" type="datetimeFigureOut">
               <a:rPr kumimoji="1" lang="ja-JP" altLang="en-US" smtClean="0"/>
               <a:t>2026/7/30</a:t>
             </a:fld>
@@ -270,7 +270,7 @@
           <p:cNvPr id="5" name="フッター プレースホルダー 4">
             <a:extLst>
               <a:ext uri="{FF2B5EF4-FFF2-40B4-BE49-F238E27FC236}">
-                <a16:creationId xmlns:a16="http://schemas.microsoft.com/office/drawing/2014/main" id="{C77A670E-805B-C8CA-93F9-3E0EDA45EBDB}"/>
+                <a16:creationId xmlns:a16="http://schemas.microsoft.com/office/drawing/2014/main" id="{AF9BC765-C2AB-EF57-E216-4BC7F4BF1E58}"/>
               </a:ext>
             </a:extLst>
           </p:cNvPr>
@@ -295,7 +295,7 @@
           <p:cNvPr id="6" name="スライド番号プレースホルダー 5">
             <a:extLst>
               <a:ext uri="{FF2B5EF4-FFF2-40B4-BE49-F238E27FC236}">
-                <a16:creationId xmlns:a16="http://schemas.microsoft.com/office/drawing/2014/main" id="{842FD764-433E-7A04-5C99-C5FE46017891}"/>
+                <a16:creationId xmlns:a16="http://schemas.microsoft.com/office/drawing/2014/main" id="{27AAA27D-4F47-DF2A-EF7C-866D99A118A0}"/>
               </a:ext>
             </a:extLst>
           </p:cNvPr>
@@ -311,7 +311,7 @@
           <a:bodyPr/>
           <a:lstStyle/>
           <a:p>
-            <a:fld id="{7201DACA-22C6-4D78-968D-BDEF84B1C0D4}" type="slidenum">
+            <a:fld id="{8C32973D-27DF-4F5A-A2A7-205083D74E96}" type="slidenum">
               <a:rPr kumimoji="1" lang="ja-JP" altLang="en-US" smtClean="0"/>
               <a:t>‹#›</a:t>
             </a:fld>
@@ -322,7 +322,7 @@
     </p:spTree>
     <p:extLst>
       <p:ext uri="{BB962C8B-B14F-4D97-AF65-F5344CB8AC3E}">
-        <p14:creationId xmlns:p14="http://schemas.microsoft.com/office/powerpoint/2010/main" val="800242417"/>
+        <p14:creationId xmlns:p14="http://schemas.microsoft.com/office/powerpoint/2010/main" val="932875465"/>
       </p:ext>
     </p:extLst>
   </p:cSld>
@@ -354,7 +354,7 @@
           <p:cNvPr id="2" name="タイトル 1">
             <a:extLst>
               <a:ext uri="{FF2B5EF4-FFF2-40B4-BE49-F238E27FC236}">
-                <a16:creationId xmlns:a16="http://schemas.microsoft.com/office/drawing/2014/main" id="{5297402A-D7AC-18B8-7DBC-AFC72E9580D9}"/>
+                <a16:creationId xmlns:a16="http://schemas.microsoft.com/office/drawing/2014/main" id="{E47C881C-9952-C226-AC2E-480C112F5F86}"/>
               </a:ext>
             </a:extLst>
           </p:cNvPr>
@@ -382,7 +382,7 @@
           <p:cNvPr id="3" name="縦書きテキスト プレースホルダー 2">
             <a:extLst>
               <a:ext uri="{FF2B5EF4-FFF2-40B4-BE49-F238E27FC236}">
-                <a16:creationId xmlns:a16="http://schemas.microsoft.com/office/drawing/2014/main" id="{39BFE321-F027-B3B3-5D2E-82F8C1756905}"/>
+                <a16:creationId xmlns:a16="http://schemas.microsoft.com/office/drawing/2014/main" id="{E5E5C0D5-C953-FFA8-A636-93E1210B1367}"/>
               </a:ext>
             </a:extLst>
           </p:cNvPr>
@@ -471,7 +471,7 @@
           <p:cNvPr id="4" name="日付プレースホルダー 3">
             <a:extLst>
               <a:ext uri="{FF2B5EF4-FFF2-40B4-BE49-F238E27FC236}">
-                <a16:creationId xmlns:a16="http://schemas.microsoft.com/office/drawing/2014/main" id="{92ADEE40-E51A-7861-31A6-FBCA3B2D2A74}"/>
+                <a16:creationId xmlns:a16="http://schemas.microsoft.com/office/drawing/2014/main" id="{2A6DAD5F-61FB-B175-BD86-F790EA50DD53}"/>
               </a:ext>
             </a:extLst>
           </p:cNvPr>
@@ -487,7 +487,7 @@
           <a:bodyPr/>
           <a:lstStyle/>
           <a:p>
-            <a:fld id="{9D890F3C-5D16-401D-9938-A42744898A22}" type="datetimeFigureOut">
+            <a:fld id="{4B28C2A7-CA13-47F5-B31F-225FA1F55699}" type="datetimeFigureOut">
               <a:rPr kumimoji="1" lang="ja-JP" altLang="en-US" smtClean="0"/>
               <a:t>2026/7/30</a:t>
             </a:fld>
@@ -500,7 +500,7 @@
           <p:cNvPr id="5" name="フッター プレースホルダー 4">
             <a:extLst>
               <a:ext uri="{FF2B5EF4-FFF2-40B4-BE49-F238E27FC236}">
-                <a16:creationId xmlns:a16="http://schemas.microsoft.com/office/drawing/2014/main" id="{CEB95944-80FE-7724-AAFC-895AA0CC8E86}"/>
+                <a16:creationId xmlns:a16="http://schemas.microsoft.com/office/drawing/2014/main" id="{BF9FEA11-CE0A-A779-DB08-73AD081D815C}"/>
               </a:ext>
             </a:extLst>
           </p:cNvPr>
@@ -525,7 +525,7 @@
           <p:cNvPr id="6" name="スライド番号プレースホルダー 5">
             <a:extLst>
               <a:ext uri="{FF2B5EF4-FFF2-40B4-BE49-F238E27FC236}">
-                <a16:creationId xmlns:a16="http://schemas.microsoft.com/office/drawing/2014/main" id="{3D7CE12D-5F4D-50B5-95E4-D4E1E6A6412C}"/>
+                <a16:creationId xmlns:a16="http://schemas.microsoft.com/office/drawing/2014/main" id="{C7822E46-1011-385B-0799-66021B86DC34}"/>
               </a:ext>
             </a:extLst>
           </p:cNvPr>
@@ -541,7 +541,7 @@
           <a:bodyPr/>
           <a:lstStyle/>
           <a:p>
-            <a:fld id="{7201DACA-22C6-4D78-968D-BDEF84B1C0D4}" type="slidenum">
+            <a:fld id="{8C32973D-27DF-4F5A-A2A7-205083D74E96}" type="slidenum">
               <a:rPr kumimoji="1" lang="ja-JP" altLang="en-US" smtClean="0"/>
               <a:t>‹#›</a:t>
             </a:fld>
@@ -552,7 +552,7 @@
     </p:spTree>
     <p:extLst>
       <p:ext uri="{BB962C8B-B14F-4D97-AF65-F5344CB8AC3E}">
-        <p14:creationId xmlns:p14="http://schemas.microsoft.com/office/powerpoint/2010/main" val="3603154434"/>
+        <p14:creationId xmlns:p14="http://schemas.microsoft.com/office/powerpoint/2010/main" val="3851637660"/>
       </p:ext>
     </p:extLst>
   </p:cSld>
@@ -584,7 +584,7 @@
           <p:cNvPr id="2" name="縦書きタイトル 1">
             <a:extLst>
               <a:ext uri="{FF2B5EF4-FFF2-40B4-BE49-F238E27FC236}">
-                <a16:creationId xmlns:a16="http://schemas.microsoft.com/office/drawing/2014/main" id="{821549F7-0C3F-DC57-FF43-DEFCFAB3FE43}"/>
+                <a16:creationId xmlns:a16="http://schemas.microsoft.com/office/drawing/2014/main" id="{02677F8C-74F0-3DFD-4D04-438DBA9F408F}"/>
               </a:ext>
             </a:extLst>
           </p:cNvPr>
@@ -617,7 +617,7 @@
           <p:cNvPr id="3" name="縦書きテキスト プレースホルダー 2">
             <a:extLst>
               <a:ext uri="{FF2B5EF4-FFF2-40B4-BE49-F238E27FC236}">
-                <a16:creationId xmlns:a16="http://schemas.microsoft.com/office/drawing/2014/main" id="{8FE822E2-B795-71B5-06B0-206C9F1C808D}"/>
+                <a16:creationId xmlns:a16="http://schemas.microsoft.com/office/drawing/2014/main" id="{009F56AC-8812-0A16-BE37-1D526D44549B}"/>
               </a:ext>
             </a:extLst>
           </p:cNvPr>
@@ -711,7 +711,7 @@
           <p:cNvPr id="4" name="日付プレースホルダー 3">
             <a:extLst>
               <a:ext uri="{FF2B5EF4-FFF2-40B4-BE49-F238E27FC236}">
-                <a16:creationId xmlns:a16="http://schemas.microsoft.com/office/drawing/2014/main" id="{18515E6B-A4DB-3797-667E-FD69386ECB47}"/>
+                <a16:creationId xmlns:a16="http://schemas.microsoft.com/office/drawing/2014/main" id="{420013DD-E63B-B017-3110-58D44EEDA7B0}"/>
               </a:ext>
             </a:extLst>
           </p:cNvPr>
@@ -727,7 +727,7 @@
           <a:bodyPr/>
           <a:lstStyle/>
           <a:p>
-            <a:fld id="{9D890F3C-5D16-401D-9938-A42744898A22}" type="datetimeFigureOut">
+            <a:fld id="{4B28C2A7-CA13-47F5-B31F-225FA1F55699}" type="datetimeFigureOut">
               <a:rPr kumimoji="1" lang="ja-JP" altLang="en-US" smtClean="0"/>
               <a:t>2026/7/30</a:t>
             </a:fld>
@@ -740,7 +740,7 @@
           <p:cNvPr id="5" name="フッター プレースホルダー 4">
             <a:extLst>
               <a:ext uri="{FF2B5EF4-FFF2-40B4-BE49-F238E27FC236}">
-                <a16:creationId xmlns:a16="http://schemas.microsoft.com/office/drawing/2014/main" id="{0F300487-CAF3-3922-756E-2F3F98AC2068}"/>
+                <a16:creationId xmlns:a16="http://schemas.microsoft.com/office/drawing/2014/main" id="{BFC19EFC-131B-42B0-FCD7-B4CC0E6621C7}"/>
               </a:ext>
             </a:extLst>
           </p:cNvPr>
@@ -765,7 +765,7 @@
           <p:cNvPr id="6" name="スライド番号プレースホルダー 5">
             <a:extLst>
               <a:ext uri="{FF2B5EF4-FFF2-40B4-BE49-F238E27FC236}">
-                <a16:creationId xmlns:a16="http://schemas.microsoft.com/office/drawing/2014/main" id="{9B7F4417-9EFB-716F-31A3-B7AA6D257D3C}"/>
+                <a16:creationId xmlns:a16="http://schemas.microsoft.com/office/drawing/2014/main" id="{8B3C8A2D-6033-1F04-881F-3ECBA3539BA2}"/>
               </a:ext>
             </a:extLst>
           </p:cNvPr>
@@ -781,7 +781,7 @@
           <a:bodyPr/>
           <a:lstStyle/>
           <a:p>
-            <a:fld id="{7201DACA-22C6-4D78-968D-BDEF84B1C0D4}" type="slidenum">
+            <a:fld id="{8C32973D-27DF-4F5A-A2A7-205083D74E96}" type="slidenum">
               <a:rPr kumimoji="1" lang="ja-JP" altLang="en-US" smtClean="0"/>
               <a:t>‹#›</a:t>
             </a:fld>
@@ -792,7 +792,7 @@
     </p:spTree>
     <p:extLst>
       <p:ext uri="{BB962C8B-B14F-4D97-AF65-F5344CB8AC3E}">
-        <p14:creationId xmlns:p14="http://schemas.microsoft.com/office/powerpoint/2010/main" val="3382255001"/>
+        <p14:creationId xmlns:p14="http://schemas.microsoft.com/office/powerpoint/2010/main" val="1941590075"/>
       </p:ext>
     </p:extLst>
   </p:cSld>
@@ -824,7 +824,7 @@
           <p:cNvPr id="2" name="タイトル 1">
             <a:extLst>
               <a:ext uri="{FF2B5EF4-FFF2-40B4-BE49-F238E27FC236}">
-                <a16:creationId xmlns:a16="http://schemas.microsoft.com/office/drawing/2014/main" id="{F569A1AB-1D9C-F087-2BC7-393BFDF948ED}"/>
+                <a16:creationId xmlns:a16="http://schemas.microsoft.com/office/drawing/2014/main" id="{20B772A8-2013-F9BB-36A6-142C26B293EB}"/>
               </a:ext>
             </a:extLst>
           </p:cNvPr>
@@ -852,7 +852,7 @@
           <p:cNvPr id="3" name="コンテンツ プレースホルダー 2">
             <a:extLst>
               <a:ext uri="{FF2B5EF4-FFF2-40B4-BE49-F238E27FC236}">
-                <a16:creationId xmlns:a16="http://schemas.microsoft.com/office/drawing/2014/main" id="{14372EB8-7500-A9C5-C441-E93390A59839}"/>
+                <a16:creationId xmlns:a16="http://schemas.microsoft.com/office/drawing/2014/main" id="{FEECFA10-27D4-AA2F-2E80-C95E3CBE62B8}"/>
               </a:ext>
             </a:extLst>
           </p:cNvPr>
@@ -941,7 +941,7 @@
           <p:cNvPr id="4" name="日付プレースホルダー 3">
             <a:extLst>
               <a:ext uri="{FF2B5EF4-FFF2-40B4-BE49-F238E27FC236}">
-                <a16:creationId xmlns:a16="http://schemas.microsoft.com/office/drawing/2014/main" id="{E3FEA74A-3897-0772-09EE-724DCD456EB2}"/>
+                <a16:creationId xmlns:a16="http://schemas.microsoft.com/office/drawing/2014/main" id="{06BB6EB8-1844-C4B5-6BE9-484AB4E671DF}"/>
               </a:ext>
             </a:extLst>
           </p:cNvPr>
@@ -957,7 +957,7 @@
           <a:bodyPr/>
           <a:lstStyle/>
           <a:p>
-            <a:fld id="{9D890F3C-5D16-401D-9938-A42744898A22}" type="datetimeFigureOut">
+            <a:fld id="{4B28C2A7-CA13-47F5-B31F-225FA1F55699}" type="datetimeFigureOut">
               <a:rPr kumimoji="1" lang="ja-JP" altLang="en-US" smtClean="0"/>
               <a:t>2026/7/30</a:t>
             </a:fld>
@@ -970,7 +970,7 @@
           <p:cNvPr id="5" name="フッター プレースホルダー 4">
             <a:extLst>
               <a:ext uri="{FF2B5EF4-FFF2-40B4-BE49-F238E27FC236}">
-                <a16:creationId xmlns:a16="http://schemas.microsoft.com/office/drawing/2014/main" id="{3B056B38-4F92-67BB-86F3-13BF64FB0E02}"/>
+                <a16:creationId xmlns:a16="http://schemas.microsoft.com/office/drawing/2014/main" id="{D5CDF098-3F4E-8088-4313-B36E72114665}"/>
               </a:ext>
             </a:extLst>
           </p:cNvPr>
@@ -995,7 +995,7 @@
           <p:cNvPr id="6" name="スライド番号プレースホルダー 5">
             <a:extLst>
               <a:ext uri="{FF2B5EF4-FFF2-40B4-BE49-F238E27FC236}">
-                <a16:creationId xmlns:a16="http://schemas.microsoft.com/office/drawing/2014/main" id="{438F5205-6EC6-7E17-581A-2E3FE7384891}"/>
+                <a16:creationId xmlns:a16="http://schemas.microsoft.com/office/drawing/2014/main" id="{9443B275-9F42-68F8-BE82-5ECBF12F9B58}"/>
               </a:ext>
             </a:extLst>
           </p:cNvPr>
@@ -1011,7 +1011,7 @@
           <a:bodyPr/>
           <a:lstStyle/>
           <a:p>
-            <a:fld id="{7201DACA-22C6-4D78-968D-BDEF84B1C0D4}" type="slidenum">
+            <a:fld id="{8C32973D-27DF-4F5A-A2A7-205083D74E96}" type="slidenum">
               <a:rPr kumimoji="1" lang="ja-JP" altLang="en-US" smtClean="0"/>
               <a:t>‹#›</a:t>
             </a:fld>
@@ -1022,7 +1022,7 @@
     </p:spTree>
     <p:extLst>
       <p:ext uri="{BB962C8B-B14F-4D97-AF65-F5344CB8AC3E}">
-        <p14:creationId xmlns:p14="http://schemas.microsoft.com/office/powerpoint/2010/main" val="2730074799"/>
+        <p14:creationId xmlns:p14="http://schemas.microsoft.com/office/powerpoint/2010/main" val="3067731298"/>
       </p:ext>
     </p:extLst>
   </p:cSld>
@@ -1054,7 +1054,7 @@
           <p:cNvPr id="2" name="タイトル 1">
             <a:extLst>
               <a:ext uri="{FF2B5EF4-FFF2-40B4-BE49-F238E27FC236}">
-                <a16:creationId xmlns:a16="http://schemas.microsoft.com/office/drawing/2014/main" id="{442C2FE3-C319-B545-4FC1-00BFD7F125CD}"/>
+                <a16:creationId xmlns:a16="http://schemas.microsoft.com/office/drawing/2014/main" id="{8BEFAB1D-E1B4-126C-6B82-9E7E3C380BE4}"/>
               </a:ext>
             </a:extLst>
           </p:cNvPr>
@@ -1091,7 +1091,7 @@
           <p:cNvPr id="3" name="テキスト プレースホルダー 2">
             <a:extLst>
               <a:ext uri="{FF2B5EF4-FFF2-40B4-BE49-F238E27FC236}">
-                <a16:creationId xmlns:a16="http://schemas.microsoft.com/office/drawing/2014/main" id="{01815A9E-FDBC-129B-3814-D033820FA098}"/>
+                <a16:creationId xmlns:a16="http://schemas.microsoft.com/office/drawing/2014/main" id="{5F98515C-E932-030F-BF94-4501FAA8FF93}"/>
               </a:ext>
             </a:extLst>
           </p:cNvPr>
@@ -1216,7 +1216,7 @@
           <p:cNvPr id="4" name="日付プレースホルダー 3">
             <a:extLst>
               <a:ext uri="{FF2B5EF4-FFF2-40B4-BE49-F238E27FC236}">
-                <a16:creationId xmlns:a16="http://schemas.microsoft.com/office/drawing/2014/main" id="{2C74A7BE-6202-BF07-FC96-5ED0563B023F}"/>
+                <a16:creationId xmlns:a16="http://schemas.microsoft.com/office/drawing/2014/main" id="{55302C13-2CBE-78A1-581E-B7E19B3B4065}"/>
               </a:ext>
             </a:extLst>
           </p:cNvPr>
@@ -1232,7 +1232,7 @@
           <a:bodyPr/>
           <a:lstStyle/>
           <a:p>
-            <a:fld id="{9D890F3C-5D16-401D-9938-A42744898A22}" type="datetimeFigureOut">
+            <a:fld id="{4B28C2A7-CA13-47F5-B31F-225FA1F55699}" type="datetimeFigureOut">
               <a:rPr kumimoji="1" lang="ja-JP" altLang="en-US" smtClean="0"/>
               <a:t>2026/7/30</a:t>
             </a:fld>
@@ -1245,7 +1245,7 @@
           <p:cNvPr id="5" name="フッター プレースホルダー 4">
             <a:extLst>
               <a:ext uri="{FF2B5EF4-FFF2-40B4-BE49-F238E27FC236}">
-                <a16:creationId xmlns:a16="http://schemas.microsoft.com/office/drawing/2014/main" id="{950FBE8A-FD0B-FF31-DDB3-AFD05D0574A6}"/>
+                <a16:creationId xmlns:a16="http://schemas.microsoft.com/office/drawing/2014/main" id="{1868DF7D-88A8-8983-66AB-82C7E7ECAB9F}"/>
               </a:ext>
             </a:extLst>
           </p:cNvPr>
@@ -1270,7 +1270,7 @@
           <p:cNvPr id="6" name="スライド番号プレースホルダー 5">
             <a:extLst>
               <a:ext uri="{FF2B5EF4-FFF2-40B4-BE49-F238E27FC236}">
-                <a16:creationId xmlns:a16="http://schemas.microsoft.com/office/drawing/2014/main" id="{53535FB4-42CF-BA42-25D6-7B3698BA37DA}"/>
+                <a16:creationId xmlns:a16="http://schemas.microsoft.com/office/drawing/2014/main" id="{3B8E4248-03D1-7D46-1AE1-06ADAC045F5D}"/>
               </a:ext>
             </a:extLst>
           </p:cNvPr>
@@ -1286,7 +1286,7 @@
           <a:bodyPr/>
           <a:lstStyle/>
           <a:p>
-            <a:fld id="{7201DACA-22C6-4D78-968D-BDEF84B1C0D4}" type="slidenum">
+            <a:fld id="{8C32973D-27DF-4F5A-A2A7-205083D74E96}" type="slidenum">
               <a:rPr kumimoji="1" lang="ja-JP" altLang="en-US" smtClean="0"/>
               <a:t>‹#›</a:t>
             </a:fld>
@@ -1297,7 +1297,7 @@
     </p:spTree>
     <p:extLst>
       <p:ext uri="{BB962C8B-B14F-4D97-AF65-F5344CB8AC3E}">
-        <p14:creationId xmlns:p14="http://schemas.microsoft.com/office/powerpoint/2010/main" val="4271153711"/>
+        <p14:creationId xmlns:p14="http://schemas.microsoft.com/office/powerpoint/2010/main" val="2903393721"/>
       </p:ext>
     </p:extLst>
   </p:cSld>
@@ -1329,7 +1329,7 @@
           <p:cNvPr id="2" name="タイトル 1">
             <a:extLst>
               <a:ext uri="{FF2B5EF4-FFF2-40B4-BE49-F238E27FC236}">
-                <a16:creationId xmlns:a16="http://schemas.microsoft.com/office/drawing/2014/main" id="{44E8921E-5DA1-507B-0993-63C3FDDD8B62}"/>
+                <a16:creationId xmlns:a16="http://schemas.microsoft.com/office/drawing/2014/main" id="{7729474A-BCE0-D1BF-B779-96E55A414086}"/>
               </a:ext>
             </a:extLst>
           </p:cNvPr>
@@ -1357,7 +1357,7 @@
           <p:cNvPr id="3" name="コンテンツ プレースホルダー 2">
             <a:extLst>
               <a:ext uri="{FF2B5EF4-FFF2-40B4-BE49-F238E27FC236}">
-                <a16:creationId xmlns:a16="http://schemas.microsoft.com/office/drawing/2014/main" id="{478B1B40-F42B-B78F-08FA-50901C27FBCD}"/>
+                <a16:creationId xmlns:a16="http://schemas.microsoft.com/office/drawing/2014/main" id="{F60039BE-3F95-C6BF-948D-D72F35B40A2C}"/>
               </a:ext>
             </a:extLst>
           </p:cNvPr>
@@ -1451,7 +1451,7 @@
           <p:cNvPr id="4" name="コンテンツ プレースホルダー 3">
             <a:extLst>
               <a:ext uri="{FF2B5EF4-FFF2-40B4-BE49-F238E27FC236}">
-                <a16:creationId xmlns:a16="http://schemas.microsoft.com/office/drawing/2014/main" id="{00345593-2E24-4739-FEBA-82F523774E3F}"/>
+                <a16:creationId xmlns:a16="http://schemas.microsoft.com/office/drawing/2014/main" id="{5878D7D2-A011-1387-9842-1C1EC112539D}"/>
               </a:ext>
             </a:extLst>
           </p:cNvPr>
@@ -1545,7 +1545,7 @@
           <p:cNvPr id="5" name="日付プレースホルダー 4">
             <a:extLst>
               <a:ext uri="{FF2B5EF4-FFF2-40B4-BE49-F238E27FC236}">
-                <a16:creationId xmlns:a16="http://schemas.microsoft.com/office/drawing/2014/main" id="{05C33E77-EB3F-0C03-242A-E1C22AB125E7}"/>
+                <a16:creationId xmlns:a16="http://schemas.microsoft.com/office/drawing/2014/main" id="{036DC744-3EEF-6722-0C98-046BF179FEC9}"/>
               </a:ext>
             </a:extLst>
           </p:cNvPr>
@@ -1561,7 +1561,7 @@
           <a:bodyPr/>
           <a:lstStyle/>
           <a:p>
-            <a:fld id="{9D890F3C-5D16-401D-9938-A42744898A22}" type="datetimeFigureOut">
+            <a:fld id="{4B28C2A7-CA13-47F5-B31F-225FA1F55699}" type="datetimeFigureOut">
               <a:rPr kumimoji="1" lang="ja-JP" altLang="en-US" smtClean="0"/>
               <a:t>2026/7/30</a:t>
             </a:fld>
@@ -1574,7 +1574,7 @@
           <p:cNvPr id="6" name="フッター プレースホルダー 5">
             <a:extLst>
               <a:ext uri="{FF2B5EF4-FFF2-40B4-BE49-F238E27FC236}">
-                <a16:creationId xmlns:a16="http://schemas.microsoft.com/office/drawing/2014/main" id="{E5C83E48-A86B-E7C3-53B1-A6F045B64153}"/>
+                <a16:creationId xmlns:a16="http://schemas.microsoft.com/office/drawing/2014/main" id="{4B9127FD-7A49-CBF5-24DE-2D6727AD27CC}"/>
               </a:ext>
             </a:extLst>
           </p:cNvPr>
@@ -1599,7 +1599,7 @@
           <p:cNvPr id="7" name="スライド番号プレースホルダー 6">
             <a:extLst>
               <a:ext uri="{FF2B5EF4-FFF2-40B4-BE49-F238E27FC236}">
-                <a16:creationId xmlns:a16="http://schemas.microsoft.com/office/drawing/2014/main" id="{483E1A5A-3394-36D2-3E78-7591DD9679DC}"/>
+                <a16:creationId xmlns:a16="http://schemas.microsoft.com/office/drawing/2014/main" id="{9D2FBEA5-54ED-1E87-B88E-A93ECC433C30}"/>
               </a:ext>
             </a:extLst>
           </p:cNvPr>
@@ -1615,7 +1615,7 @@
           <a:bodyPr/>
           <a:lstStyle/>
           <a:p>
-            <a:fld id="{7201DACA-22C6-4D78-968D-BDEF84B1C0D4}" type="slidenum">
+            <a:fld id="{8C32973D-27DF-4F5A-A2A7-205083D74E96}" type="slidenum">
               <a:rPr kumimoji="1" lang="ja-JP" altLang="en-US" smtClean="0"/>
               <a:t>‹#›</a:t>
             </a:fld>
@@ -1626,7 +1626,7 @@
     </p:spTree>
     <p:extLst>
       <p:ext uri="{BB962C8B-B14F-4D97-AF65-F5344CB8AC3E}">
-        <p14:creationId xmlns:p14="http://schemas.microsoft.com/office/powerpoint/2010/main" val="3431644827"/>
+        <p14:creationId xmlns:p14="http://schemas.microsoft.com/office/powerpoint/2010/main" val="3607730303"/>
       </p:ext>
     </p:extLst>
   </p:cSld>
@@ -1658,7 +1658,7 @@
           <p:cNvPr id="2" name="タイトル 1">
             <a:extLst>
               <a:ext uri="{FF2B5EF4-FFF2-40B4-BE49-F238E27FC236}">
-                <a16:creationId xmlns:a16="http://schemas.microsoft.com/office/drawing/2014/main" id="{C013E063-6A41-5FEC-E434-2656C1FE311B}"/>
+                <a16:creationId xmlns:a16="http://schemas.microsoft.com/office/drawing/2014/main" id="{2EC393FF-1536-B878-93F0-CC4E3827A113}"/>
               </a:ext>
             </a:extLst>
           </p:cNvPr>
@@ -1691,7 +1691,7 @@
           <p:cNvPr id="3" name="テキスト プレースホルダー 2">
             <a:extLst>
               <a:ext uri="{FF2B5EF4-FFF2-40B4-BE49-F238E27FC236}">
-                <a16:creationId xmlns:a16="http://schemas.microsoft.com/office/drawing/2014/main" id="{7D626ED3-353C-113C-DE08-4E1D6DA9F49E}"/>
+                <a16:creationId xmlns:a16="http://schemas.microsoft.com/office/drawing/2014/main" id="{6CFD294D-EE8E-0519-EBA4-7FD3DEA24DA6}"/>
               </a:ext>
             </a:extLst>
           </p:cNvPr>
@@ -1762,7 +1762,7 @@
           <p:cNvPr id="4" name="コンテンツ プレースホルダー 3">
             <a:extLst>
               <a:ext uri="{FF2B5EF4-FFF2-40B4-BE49-F238E27FC236}">
-                <a16:creationId xmlns:a16="http://schemas.microsoft.com/office/drawing/2014/main" id="{2ADE0E07-4DCB-81CB-B499-1D71180F18AC}"/>
+                <a16:creationId xmlns:a16="http://schemas.microsoft.com/office/drawing/2014/main" id="{BFDD216A-1C5F-1DBC-3106-BC7A92C92ED3}"/>
               </a:ext>
             </a:extLst>
           </p:cNvPr>
@@ -1856,7 +1856,7 @@
           <p:cNvPr id="5" name="テキスト プレースホルダー 4">
             <a:extLst>
               <a:ext uri="{FF2B5EF4-FFF2-40B4-BE49-F238E27FC236}">
-                <a16:creationId xmlns:a16="http://schemas.microsoft.com/office/drawing/2014/main" id="{2AAB18EA-1616-69B6-8702-4350EAC70225}"/>
+                <a16:creationId xmlns:a16="http://schemas.microsoft.com/office/drawing/2014/main" id="{7862154B-55AE-ADE9-8D51-9DC81167A3E0}"/>
               </a:ext>
             </a:extLst>
           </p:cNvPr>
@@ -1927,7 +1927,7 @@
           <p:cNvPr id="6" name="コンテンツ プレースホルダー 5">
             <a:extLst>
               <a:ext uri="{FF2B5EF4-FFF2-40B4-BE49-F238E27FC236}">
-                <a16:creationId xmlns:a16="http://schemas.microsoft.com/office/drawing/2014/main" id="{1C5E62D4-117D-A830-E519-DE43819D754B}"/>
+                <a16:creationId xmlns:a16="http://schemas.microsoft.com/office/drawing/2014/main" id="{C0FC1458-C1AA-E431-CD24-6EDCFE98FBC6}"/>
               </a:ext>
             </a:extLst>
           </p:cNvPr>
@@ -2021,7 +2021,7 @@
           <p:cNvPr id="7" name="日付プレースホルダー 6">
             <a:extLst>
               <a:ext uri="{FF2B5EF4-FFF2-40B4-BE49-F238E27FC236}">
-                <a16:creationId xmlns:a16="http://schemas.microsoft.com/office/drawing/2014/main" id="{36E833EF-D4A5-32F3-3E62-930F6C20A3A8}"/>
+                <a16:creationId xmlns:a16="http://schemas.microsoft.com/office/drawing/2014/main" id="{44D984B1-B184-FA98-3327-EB5DFD1D3771}"/>
               </a:ext>
             </a:extLst>
           </p:cNvPr>
@@ -2037,7 +2037,7 @@
           <a:bodyPr/>
           <a:lstStyle/>
           <a:p>
-            <a:fld id="{9D890F3C-5D16-401D-9938-A42744898A22}" type="datetimeFigureOut">
+            <a:fld id="{4B28C2A7-CA13-47F5-B31F-225FA1F55699}" type="datetimeFigureOut">
               <a:rPr kumimoji="1" lang="ja-JP" altLang="en-US" smtClean="0"/>
               <a:t>2026/7/30</a:t>
             </a:fld>
@@ -2050,7 +2050,7 @@
           <p:cNvPr id="8" name="フッター プレースホルダー 7">
             <a:extLst>
               <a:ext uri="{FF2B5EF4-FFF2-40B4-BE49-F238E27FC236}">
-                <a16:creationId xmlns:a16="http://schemas.microsoft.com/office/drawing/2014/main" id="{50B36C62-0FB1-D30A-AC17-8A5CC799BC56}"/>
+                <a16:creationId xmlns:a16="http://schemas.microsoft.com/office/drawing/2014/main" id="{EBC95B06-77A9-88BF-C70D-BE2B86F01F3C}"/>
               </a:ext>
             </a:extLst>
           </p:cNvPr>
@@ -2075,7 +2075,7 @@
           <p:cNvPr id="9" name="スライド番号プレースホルダー 8">
             <a:extLst>
               <a:ext uri="{FF2B5EF4-FFF2-40B4-BE49-F238E27FC236}">
-                <a16:creationId xmlns:a16="http://schemas.microsoft.com/office/drawing/2014/main" id="{E56F899B-C410-51B9-753C-227FF9A2BD0D}"/>
+                <a16:creationId xmlns:a16="http://schemas.microsoft.com/office/drawing/2014/main" id="{2B17C29F-D3CA-6672-6A4D-BCDBB4CB3961}"/>
               </a:ext>
             </a:extLst>
           </p:cNvPr>
@@ -2091,7 +2091,7 @@
           <a:bodyPr/>
           <a:lstStyle/>
           <a:p>
-            <a:fld id="{7201DACA-22C6-4D78-968D-BDEF84B1C0D4}" type="slidenum">
+            <a:fld id="{8C32973D-27DF-4F5A-A2A7-205083D74E96}" type="slidenum">
               <a:rPr kumimoji="1" lang="ja-JP" altLang="en-US" smtClean="0"/>
               <a:t>‹#›</a:t>
             </a:fld>
@@ -2102,7 +2102,7 @@
     </p:spTree>
     <p:extLst>
       <p:ext uri="{BB962C8B-B14F-4D97-AF65-F5344CB8AC3E}">
-        <p14:creationId xmlns:p14="http://schemas.microsoft.com/office/powerpoint/2010/main" val="2079960438"/>
+        <p14:creationId xmlns:p14="http://schemas.microsoft.com/office/powerpoint/2010/main" val="432527593"/>
       </p:ext>
     </p:extLst>
   </p:cSld>
@@ -2134,7 +2134,7 @@
           <p:cNvPr id="2" name="タイトル 1">
             <a:extLst>
               <a:ext uri="{FF2B5EF4-FFF2-40B4-BE49-F238E27FC236}">
-                <a16:creationId xmlns:a16="http://schemas.microsoft.com/office/drawing/2014/main" id="{C4A50C69-A904-D1ED-3D98-B7ED7DBA49FC}"/>
+                <a16:creationId xmlns:a16="http://schemas.microsoft.com/office/drawing/2014/main" id="{59866322-C234-E2A3-2D50-894DA9EC509D}"/>
               </a:ext>
             </a:extLst>
           </p:cNvPr>
@@ -2162,7 +2162,7 @@
           <p:cNvPr id="3" name="日付プレースホルダー 2">
             <a:extLst>
               <a:ext uri="{FF2B5EF4-FFF2-40B4-BE49-F238E27FC236}">
-                <a16:creationId xmlns:a16="http://schemas.microsoft.com/office/drawing/2014/main" id="{9F980DD8-813A-C765-6742-5F0D53A6928D}"/>
+                <a16:creationId xmlns:a16="http://schemas.microsoft.com/office/drawing/2014/main" id="{DF540908-0B25-03BE-F7A9-0DC6DB6AE629}"/>
               </a:ext>
             </a:extLst>
           </p:cNvPr>
@@ -2178,7 +2178,7 @@
           <a:bodyPr/>
           <a:lstStyle/>
           <a:p>
-            <a:fld id="{9D890F3C-5D16-401D-9938-A42744898A22}" type="datetimeFigureOut">
+            <a:fld id="{4B28C2A7-CA13-47F5-B31F-225FA1F55699}" type="datetimeFigureOut">
               <a:rPr kumimoji="1" lang="ja-JP" altLang="en-US" smtClean="0"/>
               <a:t>2026/7/30</a:t>
             </a:fld>
@@ -2191,7 +2191,7 @@
           <p:cNvPr id="4" name="フッター プレースホルダー 3">
             <a:extLst>
               <a:ext uri="{FF2B5EF4-FFF2-40B4-BE49-F238E27FC236}">
-                <a16:creationId xmlns:a16="http://schemas.microsoft.com/office/drawing/2014/main" id="{F3B19D3D-C4D8-BE2D-8C31-B97AAA0A3984}"/>
+                <a16:creationId xmlns:a16="http://schemas.microsoft.com/office/drawing/2014/main" id="{8FA74A97-991E-AEB4-CA5C-E4AE6C673FFE}"/>
               </a:ext>
             </a:extLst>
           </p:cNvPr>
@@ -2216,7 +2216,7 @@
           <p:cNvPr id="5" name="スライド番号プレースホルダー 4">
             <a:extLst>
               <a:ext uri="{FF2B5EF4-FFF2-40B4-BE49-F238E27FC236}">
-                <a16:creationId xmlns:a16="http://schemas.microsoft.com/office/drawing/2014/main" id="{0BE3788B-5B81-A5FA-6018-914A5EB5ABBD}"/>
+                <a16:creationId xmlns:a16="http://schemas.microsoft.com/office/drawing/2014/main" id="{4A6CF27A-077F-CFC9-D49B-583BC75CDCEE}"/>
               </a:ext>
             </a:extLst>
           </p:cNvPr>
@@ -2232,7 +2232,7 @@
           <a:bodyPr/>
           <a:lstStyle/>
           <a:p>
-            <a:fld id="{7201DACA-22C6-4D78-968D-BDEF84B1C0D4}" type="slidenum">
+            <a:fld id="{8C32973D-27DF-4F5A-A2A7-205083D74E96}" type="slidenum">
               <a:rPr kumimoji="1" lang="ja-JP" altLang="en-US" smtClean="0"/>
               <a:t>‹#›</a:t>
             </a:fld>
@@ -2243,7 +2243,7 @@
     </p:spTree>
     <p:extLst>
       <p:ext uri="{BB962C8B-B14F-4D97-AF65-F5344CB8AC3E}">
-        <p14:creationId xmlns:p14="http://schemas.microsoft.com/office/powerpoint/2010/main" val="462005011"/>
+        <p14:creationId xmlns:p14="http://schemas.microsoft.com/office/powerpoint/2010/main" val="2640519055"/>
       </p:ext>
     </p:extLst>
   </p:cSld>
@@ -2275,7 +2275,7 @@
           <p:cNvPr id="2" name="日付プレースホルダー 1">
             <a:extLst>
               <a:ext uri="{FF2B5EF4-FFF2-40B4-BE49-F238E27FC236}">
-                <a16:creationId xmlns:a16="http://schemas.microsoft.com/office/drawing/2014/main" id="{68FCE11C-37CC-9A8E-865C-E61A71FDFB26}"/>
+                <a16:creationId xmlns:a16="http://schemas.microsoft.com/office/drawing/2014/main" id="{C29B6863-6DFC-C228-0D42-CF5D6C10B3D4}"/>
               </a:ext>
             </a:extLst>
           </p:cNvPr>
@@ -2291,7 +2291,7 @@
           <a:bodyPr/>
           <a:lstStyle/>
           <a:p>
-            <a:fld id="{9D890F3C-5D16-401D-9938-A42744898A22}" type="datetimeFigureOut">
+            <a:fld id="{4B28C2A7-CA13-47F5-B31F-225FA1F55699}" type="datetimeFigureOut">
               <a:rPr kumimoji="1" lang="ja-JP" altLang="en-US" smtClean="0"/>
               <a:t>2026/7/30</a:t>
             </a:fld>
@@ -2304,7 +2304,7 @@
           <p:cNvPr id="3" name="フッター プレースホルダー 2">
             <a:extLst>
               <a:ext uri="{FF2B5EF4-FFF2-40B4-BE49-F238E27FC236}">
-                <a16:creationId xmlns:a16="http://schemas.microsoft.com/office/drawing/2014/main" id="{81849781-5D6B-02A7-C808-924DBFE9F27B}"/>
+                <a16:creationId xmlns:a16="http://schemas.microsoft.com/office/drawing/2014/main" id="{34E87CBF-9EF4-CDEA-00C5-E3A2287AA5DB}"/>
               </a:ext>
             </a:extLst>
           </p:cNvPr>
@@ -2329,7 +2329,7 @@
           <p:cNvPr id="4" name="スライド番号プレースホルダー 3">
             <a:extLst>
               <a:ext uri="{FF2B5EF4-FFF2-40B4-BE49-F238E27FC236}">
-                <a16:creationId xmlns:a16="http://schemas.microsoft.com/office/drawing/2014/main" id="{D97FFC7D-2C65-14E9-BCB5-D7CBF5FC84ED}"/>
+                <a16:creationId xmlns:a16="http://schemas.microsoft.com/office/drawing/2014/main" id="{03A17E06-0E9B-EA1B-1BFA-55F17E3EB376}"/>
               </a:ext>
             </a:extLst>
           </p:cNvPr>
@@ -2345,7 +2345,7 @@
           <a:bodyPr/>
           <a:lstStyle/>
           <a:p>
-            <a:fld id="{7201DACA-22C6-4D78-968D-BDEF84B1C0D4}" type="slidenum">
+            <a:fld id="{8C32973D-27DF-4F5A-A2A7-205083D74E96}" type="slidenum">
               <a:rPr kumimoji="1" lang="ja-JP" altLang="en-US" smtClean="0"/>
               <a:t>‹#›</a:t>
             </a:fld>
@@ -2356,7 +2356,7 @@
     </p:spTree>
     <p:extLst>
       <p:ext uri="{BB962C8B-B14F-4D97-AF65-F5344CB8AC3E}">
-        <p14:creationId xmlns:p14="http://schemas.microsoft.com/office/powerpoint/2010/main" val="1804168926"/>
+        <p14:creationId xmlns:p14="http://schemas.microsoft.com/office/powerpoint/2010/main" val="1184441845"/>
       </p:ext>
     </p:extLst>
   </p:cSld>
@@ -2388,7 +2388,7 @@
           <p:cNvPr id="2" name="タイトル 1">
             <a:extLst>
               <a:ext uri="{FF2B5EF4-FFF2-40B4-BE49-F238E27FC236}">
-                <a16:creationId xmlns:a16="http://schemas.microsoft.com/office/drawing/2014/main" id="{13A69B6B-E1EE-2B61-1EC3-B0EA5DA9FCD4}"/>
+                <a16:creationId xmlns:a16="http://schemas.microsoft.com/office/drawing/2014/main" id="{A0559A9A-EDD9-9209-8EC8-A2C0BBC476B6}"/>
               </a:ext>
             </a:extLst>
           </p:cNvPr>
@@ -2425,7 +2425,7 @@
           <p:cNvPr id="3" name="コンテンツ プレースホルダー 2">
             <a:extLst>
               <a:ext uri="{FF2B5EF4-FFF2-40B4-BE49-F238E27FC236}">
-                <a16:creationId xmlns:a16="http://schemas.microsoft.com/office/drawing/2014/main" id="{B0B5F290-D500-6E17-783B-F9423F35C595}"/>
+                <a16:creationId xmlns:a16="http://schemas.microsoft.com/office/drawing/2014/main" id="{B3EF0B71-86F0-0D2E-7844-7805201CE0B3}"/>
               </a:ext>
             </a:extLst>
           </p:cNvPr>
@@ -2547,7 +2547,7 @@
           <p:cNvPr id="4" name="テキスト プレースホルダー 3">
             <a:extLst>
               <a:ext uri="{FF2B5EF4-FFF2-40B4-BE49-F238E27FC236}">
-                <a16:creationId xmlns:a16="http://schemas.microsoft.com/office/drawing/2014/main" id="{FB34B881-C1A9-48A4-628F-A42A4A6D3B5A}"/>
+                <a16:creationId xmlns:a16="http://schemas.microsoft.com/office/drawing/2014/main" id="{9E0B5DDE-BA3D-A35D-ABED-C89A762FB9BB}"/>
               </a:ext>
             </a:extLst>
           </p:cNvPr>
@@ -2618,7 +2618,7 @@
           <p:cNvPr id="5" name="日付プレースホルダー 4">
             <a:extLst>
               <a:ext uri="{FF2B5EF4-FFF2-40B4-BE49-F238E27FC236}">
-                <a16:creationId xmlns:a16="http://schemas.microsoft.com/office/drawing/2014/main" id="{9A0E6BA3-CE17-42CC-C8CE-EF77E9DC8653}"/>
+                <a16:creationId xmlns:a16="http://schemas.microsoft.com/office/drawing/2014/main" id="{58812DAA-928F-0C46-FF08-2FAEC9194FD5}"/>
               </a:ext>
             </a:extLst>
           </p:cNvPr>
@@ -2634,7 +2634,7 @@
           <a:bodyPr/>
           <a:lstStyle/>
           <a:p>
-            <a:fld id="{9D890F3C-5D16-401D-9938-A42744898A22}" type="datetimeFigureOut">
+            <a:fld id="{4B28C2A7-CA13-47F5-B31F-225FA1F55699}" type="datetimeFigureOut">
               <a:rPr kumimoji="1" lang="ja-JP" altLang="en-US" smtClean="0"/>
               <a:t>2026/7/30</a:t>
             </a:fld>
@@ -2647,7 +2647,7 @@
           <p:cNvPr id="6" name="フッター プレースホルダー 5">
             <a:extLst>
               <a:ext uri="{FF2B5EF4-FFF2-40B4-BE49-F238E27FC236}">
-                <a16:creationId xmlns:a16="http://schemas.microsoft.com/office/drawing/2014/main" id="{5E7826FE-407B-0EF7-B465-54122B4B2629}"/>
+                <a16:creationId xmlns:a16="http://schemas.microsoft.com/office/drawing/2014/main" id="{36C11993-9131-A4A7-3369-F3CBDA28222A}"/>
               </a:ext>
             </a:extLst>
           </p:cNvPr>
@@ -2672,7 +2672,7 @@
           <p:cNvPr id="7" name="スライド番号プレースホルダー 6">
             <a:extLst>
               <a:ext uri="{FF2B5EF4-FFF2-40B4-BE49-F238E27FC236}">
-                <a16:creationId xmlns:a16="http://schemas.microsoft.com/office/drawing/2014/main" id="{A69A5192-0907-5A02-4B97-9C8771B8B86F}"/>
+                <a16:creationId xmlns:a16="http://schemas.microsoft.com/office/drawing/2014/main" id="{53DABE16-A4B9-9FF4-D78E-E3F7B8CFBF69}"/>
               </a:ext>
             </a:extLst>
           </p:cNvPr>
@@ -2688,7 +2688,7 @@
           <a:bodyPr/>
           <a:lstStyle/>
           <a:p>
-            <a:fld id="{7201DACA-22C6-4D78-968D-BDEF84B1C0D4}" type="slidenum">
+            <a:fld id="{8C32973D-27DF-4F5A-A2A7-205083D74E96}" type="slidenum">
               <a:rPr kumimoji="1" lang="ja-JP" altLang="en-US" smtClean="0"/>
               <a:t>‹#›</a:t>
             </a:fld>
@@ -2699,7 +2699,7 @@
     </p:spTree>
     <p:extLst>
       <p:ext uri="{BB962C8B-B14F-4D97-AF65-F5344CB8AC3E}">
-        <p14:creationId xmlns:p14="http://schemas.microsoft.com/office/powerpoint/2010/main" val="397189558"/>
+        <p14:creationId xmlns:p14="http://schemas.microsoft.com/office/powerpoint/2010/main" val="3900321655"/>
       </p:ext>
     </p:extLst>
   </p:cSld>
@@ -2731,7 +2731,7 @@
           <p:cNvPr id="2" name="タイトル 1">
             <a:extLst>
               <a:ext uri="{FF2B5EF4-FFF2-40B4-BE49-F238E27FC236}">
-                <a16:creationId xmlns:a16="http://schemas.microsoft.com/office/drawing/2014/main" id="{74D651AD-281F-9794-05FC-B3F713F50A75}"/>
+                <a16:creationId xmlns:a16="http://schemas.microsoft.com/office/drawing/2014/main" id="{287D7040-4098-2460-3C08-241756D09175}"/>
               </a:ext>
             </a:extLst>
           </p:cNvPr>
@@ -2768,7 +2768,7 @@
           <p:cNvPr id="3" name="図プレースホルダー 2">
             <a:extLst>
               <a:ext uri="{FF2B5EF4-FFF2-40B4-BE49-F238E27FC236}">
-                <a16:creationId xmlns:a16="http://schemas.microsoft.com/office/drawing/2014/main" id="{D40FE0C3-491B-7E32-63A6-1BCD15E5BE6C}"/>
+                <a16:creationId xmlns:a16="http://schemas.microsoft.com/office/drawing/2014/main" id="{FFFB9199-C7FB-10FC-3786-0C7720BEA0A7}"/>
               </a:ext>
             </a:extLst>
           </p:cNvPr>
@@ -2835,7 +2835,7 @@
           <p:cNvPr id="4" name="テキスト プレースホルダー 3">
             <a:extLst>
               <a:ext uri="{FF2B5EF4-FFF2-40B4-BE49-F238E27FC236}">
-                <a16:creationId xmlns:a16="http://schemas.microsoft.com/office/drawing/2014/main" id="{651FFAD4-D996-45D9-F192-6283BDD8D4BC}"/>
+                <a16:creationId xmlns:a16="http://schemas.microsoft.com/office/drawing/2014/main" id="{E396157C-27DC-21A8-0B43-F896580470A0}"/>
               </a:ext>
             </a:extLst>
           </p:cNvPr>
@@ -2906,7 +2906,7 @@
           <p:cNvPr id="5" name="日付プレースホルダー 4">
             <a:extLst>
               <a:ext uri="{FF2B5EF4-FFF2-40B4-BE49-F238E27FC236}">
-                <a16:creationId xmlns:a16="http://schemas.microsoft.com/office/drawing/2014/main" id="{8FE5EEFB-34A4-13F9-E7EB-4E888117ABE2}"/>
+                <a16:creationId xmlns:a16="http://schemas.microsoft.com/office/drawing/2014/main" id="{96D2BD41-C737-1FFC-D545-86F2C4DDD343}"/>
               </a:ext>
             </a:extLst>
           </p:cNvPr>
@@ -2922,7 +2922,7 @@
           <a:bodyPr/>
           <a:lstStyle/>
           <a:p>
-            <a:fld id="{9D890F3C-5D16-401D-9938-A42744898A22}" type="datetimeFigureOut">
+            <a:fld id="{4B28C2A7-CA13-47F5-B31F-225FA1F55699}" type="datetimeFigureOut">
               <a:rPr kumimoji="1" lang="ja-JP" altLang="en-US" smtClean="0"/>
               <a:t>2026/7/30</a:t>
             </a:fld>
@@ -2935,7 +2935,7 @@
           <p:cNvPr id="6" name="フッター プレースホルダー 5">
             <a:extLst>
               <a:ext uri="{FF2B5EF4-FFF2-40B4-BE49-F238E27FC236}">
-                <a16:creationId xmlns:a16="http://schemas.microsoft.com/office/drawing/2014/main" id="{583AD91B-D4E7-7770-D9DA-751ADDFB2D34}"/>
+                <a16:creationId xmlns:a16="http://schemas.microsoft.com/office/drawing/2014/main" id="{ECCF7EC1-F1D9-AC86-99B0-76963FC34CB2}"/>
               </a:ext>
             </a:extLst>
           </p:cNvPr>
@@ -2960,7 +2960,7 @@
           <p:cNvPr id="7" name="スライド番号プレースホルダー 6">
             <a:extLst>
               <a:ext uri="{FF2B5EF4-FFF2-40B4-BE49-F238E27FC236}">
-                <a16:creationId xmlns:a16="http://schemas.microsoft.com/office/drawing/2014/main" id="{466E1B1B-BA32-5BD0-5C60-2F8C6AD4D4AB}"/>
+                <a16:creationId xmlns:a16="http://schemas.microsoft.com/office/drawing/2014/main" id="{D12993B9-A220-42F5-EF39-E79F70919F12}"/>
               </a:ext>
             </a:extLst>
           </p:cNvPr>
@@ -2976,7 +2976,7 @@
           <a:bodyPr/>
           <a:lstStyle/>
           <a:p>
-            <a:fld id="{7201DACA-22C6-4D78-968D-BDEF84B1C0D4}" type="slidenum">
+            <a:fld id="{8C32973D-27DF-4F5A-A2A7-205083D74E96}" type="slidenum">
               <a:rPr kumimoji="1" lang="ja-JP" altLang="en-US" smtClean="0"/>
               <a:t>‹#›</a:t>
             </a:fld>
@@ -2987,7 +2987,7 @@
     </p:spTree>
     <p:extLst>
       <p:ext uri="{BB962C8B-B14F-4D97-AF65-F5344CB8AC3E}">
-        <p14:creationId xmlns:p14="http://schemas.microsoft.com/office/powerpoint/2010/main" val="1056105282"/>
+        <p14:creationId xmlns:p14="http://schemas.microsoft.com/office/powerpoint/2010/main" val="1891651506"/>
       </p:ext>
     </p:extLst>
   </p:cSld>
@@ -3024,7 +3024,7 @@
           <p:cNvPr id="2" name="タイトル プレースホルダー 1">
             <a:extLst>
               <a:ext uri="{FF2B5EF4-FFF2-40B4-BE49-F238E27FC236}">
-                <a16:creationId xmlns:a16="http://schemas.microsoft.com/office/drawing/2014/main" id="{BCE4D077-2B9D-6DC1-94A1-3306AC39FEF1}"/>
+                <a16:creationId xmlns:a16="http://schemas.microsoft.com/office/drawing/2014/main" id="{6A27A92D-B46F-D4C4-3B76-A198F2DD450D}"/>
               </a:ext>
             </a:extLst>
           </p:cNvPr>
@@ -3062,7 +3062,7 @@
           <p:cNvPr id="3" name="テキスト プレースホルダー 2">
             <a:extLst>
               <a:ext uri="{FF2B5EF4-FFF2-40B4-BE49-F238E27FC236}">
-                <a16:creationId xmlns:a16="http://schemas.microsoft.com/office/drawing/2014/main" id="{69F54664-7D56-69CC-4774-7416BBC619AC}"/>
+                <a16:creationId xmlns:a16="http://schemas.microsoft.com/office/drawing/2014/main" id="{03235017-247A-5D25-CC97-A21317C0B768}"/>
               </a:ext>
             </a:extLst>
           </p:cNvPr>
@@ -3161,7 +3161,7 @@
           <p:cNvPr id="4" name="日付プレースホルダー 3">
             <a:extLst>
               <a:ext uri="{FF2B5EF4-FFF2-40B4-BE49-F238E27FC236}">
-                <a16:creationId xmlns:a16="http://schemas.microsoft.com/office/drawing/2014/main" id="{823FC45B-C268-DD24-44EF-1522155CA0A2}"/>
+                <a16:creationId xmlns:a16="http://schemas.microsoft.com/office/drawing/2014/main" id="{C222B494-4485-53DB-911A-8E5B2A14DBE2}"/>
               </a:ext>
             </a:extLst>
           </p:cNvPr>
@@ -3195,7 +3195,7 @@
             </a:lvl1pPr>
           </a:lstStyle>
           <a:p>
-            <a:fld id="{9D890F3C-5D16-401D-9938-A42744898A22}" type="datetimeFigureOut">
+            <a:fld id="{4B28C2A7-CA13-47F5-B31F-225FA1F55699}" type="datetimeFigureOut">
               <a:rPr kumimoji="1" lang="ja-JP" altLang="en-US" smtClean="0"/>
               <a:t>2026/7/30</a:t>
             </a:fld>
@@ -3208,7 +3208,7 @@
           <p:cNvPr id="5" name="フッター プレースホルダー 4">
             <a:extLst>
               <a:ext uri="{FF2B5EF4-FFF2-40B4-BE49-F238E27FC236}">
-                <a16:creationId xmlns:a16="http://schemas.microsoft.com/office/drawing/2014/main" id="{B8F18561-9BD9-3A03-3BAA-9FA79113B8DF}"/>
+                <a16:creationId xmlns:a16="http://schemas.microsoft.com/office/drawing/2014/main" id="{66E721E8-2858-15D7-0640-AB3B5C052F9D}"/>
               </a:ext>
             </a:extLst>
           </p:cNvPr>
@@ -3251,7 +3251,7 @@
           <p:cNvPr id="6" name="スライド番号プレースホルダー 5">
             <a:extLst>
               <a:ext uri="{FF2B5EF4-FFF2-40B4-BE49-F238E27FC236}">
-                <a16:creationId xmlns:a16="http://schemas.microsoft.com/office/drawing/2014/main" id="{91B02CD3-2D94-F240-45C7-F1F9A963D019}"/>
+                <a16:creationId xmlns:a16="http://schemas.microsoft.com/office/drawing/2014/main" id="{BA5BA3C1-0EB0-7C5C-E0FA-76E038724C4F}"/>
               </a:ext>
             </a:extLst>
           </p:cNvPr>
@@ -3285,7 +3285,7 @@
             </a:lvl1pPr>
           </a:lstStyle>
           <a:p>
-            <a:fld id="{7201DACA-22C6-4D78-968D-BDEF84B1C0D4}" type="slidenum">
+            <a:fld id="{8C32973D-27DF-4F5A-A2A7-205083D74E96}" type="slidenum">
               <a:rPr kumimoji="1" lang="ja-JP" altLang="en-US" smtClean="0"/>
               <a:t>‹#›</a:t>
             </a:fld>
@@ -3296,7 +3296,7 @@
     </p:spTree>
     <p:extLst>
       <p:ext uri="{BB962C8B-B14F-4D97-AF65-F5344CB8AC3E}">
-        <p14:creationId xmlns:p14="http://schemas.microsoft.com/office/powerpoint/2010/main" val="1826859247"/>
+        <p14:creationId xmlns:p14="http://schemas.microsoft.com/office/powerpoint/2010/main" val="4084020177"/>
       </p:ext>
     </p:extLst>
   </p:cSld>
@@ -3619,7 +3619,7 @@
           <p:cNvPr id="2" name="テキスト ボックス 1">
             <a:extLst>
               <a:ext uri="{FF2B5EF4-FFF2-40B4-BE49-F238E27FC236}">
-                <a16:creationId xmlns:a16="http://schemas.microsoft.com/office/drawing/2014/main" id="{AC17780E-5CD5-F24C-48D3-932B0FF46FBA}"/>
+                <a16:creationId xmlns:a16="http://schemas.microsoft.com/office/drawing/2014/main" id="{C14DA2C3-0551-259F-480D-29F7E25A062F}"/>
               </a:ext>
             </a:extLst>
           </p:cNvPr>
@@ -3665,7 +3665,7 @@
           <p:cNvPr id="3" name="テキスト ボックス 2">
             <a:extLst>
               <a:ext uri="{FF2B5EF4-FFF2-40B4-BE49-F238E27FC236}">
-                <a16:creationId xmlns:a16="http://schemas.microsoft.com/office/drawing/2014/main" id="{59BB9C16-B7FD-FAB8-8213-A20FBB1B6879}"/>
+                <a16:creationId xmlns:a16="http://schemas.microsoft.com/office/drawing/2014/main" id="{A092093E-FA67-BDE7-444E-EF1C14A53F1D}"/>
               </a:ext>
             </a:extLst>
           </p:cNvPr>
@@ -3695,14 +3695,17 @@
                 </a:solidFill>
                 <a:latin typeface="Arial" panose="020B0604020202020204" pitchFamily="34" charset="0"/>
               </a:rPr>
-              <a:t>miseoshi-web TECH EXPLANATION</a:t>
-            </a:r>
-            <a:endParaRPr kumimoji="1" lang="ja-JP" altLang="en-US" sz="3400" b="1">
-              <a:solidFill>
-                <a:srgbClr val="111111"/>
-              </a:solidFill>
-              <a:latin typeface="Arial" panose="020B0604020202020204" pitchFamily="34" charset="0"/>
-            </a:endParaRPr>
+              <a:t>Miseoshi Web</a:t>
+            </a:r>
+            <a:r>
+              <a:rPr kumimoji="1" lang="ja-JP" altLang="en-US" sz="3400" b="1">
+                <a:solidFill>
+                  <a:srgbClr val="111111"/>
+                </a:solidFill>
+                <a:latin typeface="Arial" panose="020B0604020202020204" pitchFamily="34" charset="0"/>
+              </a:rPr>
+              <a:t>の技術解説</a:t>
+            </a:r>
           </a:p>
         </p:txBody>
       </p:sp>
@@ -3711,7 +3714,7 @@
           <p:cNvPr id="4" name="テキスト ボックス 3">
             <a:extLst>
               <a:ext uri="{FF2B5EF4-FFF2-40B4-BE49-F238E27FC236}">
-                <a16:creationId xmlns:a16="http://schemas.microsoft.com/office/drawing/2014/main" id="{83E43C39-E59A-78B3-CB88-6943466BEA73}"/>
+                <a16:creationId xmlns:a16="http://schemas.microsoft.com/office/drawing/2014/main" id="{96E1ABB6-73B9-0C5A-40BD-B1493BC08FEB}"/>
               </a:ext>
             </a:extLst>
           </p:cNvPr>
@@ -3735,20 +3738,14 @@
           <a:lstStyle/>
           <a:p>
             <a:r>
-              <a:rPr kumimoji="1" lang="en-US" altLang="ja-JP" sz="2000">
+              <a:rPr kumimoji="1" lang="ja-JP" altLang="en-US" sz="2000">
                 <a:solidFill>
                   <a:srgbClr val="333333"/>
                 </a:solidFill>
                 <a:latin typeface="Arial" panose="020B0604020202020204" pitchFamily="34" charset="0"/>
               </a:rPr>
-              <a:t>Architecture, implementation and commit history in 75 seconds</a:t>
-            </a:r>
-            <a:endParaRPr kumimoji="1" lang="ja-JP" altLang="en-US" sz="2000">
-              <a:solidFill>
-                <a:srgbClr val="333333"/>
-              </a:solidFill>
-              <a:latin typeface="Arial" panose="020B0604020202020204" pitchFamily="34" charset="0"/>
-            </a:endParaRPr>
+              <a:t>設計・実装・コミットから学ぶ短時間プレビュー</a:t>
+            </a:r>
           </a:p>
         </p:txBody>
       </p:sp>
@@ -3757,7 +3754,7 @@
           <p:cNvPr id="5" name="テキスト ボックス 4">
             <a:extLst>
               <a:ext uri="{FF2B5EF4-FFF2-40B4-BE49-F238E27FC236}">
-                <a16:creationId xmlns:a16="http://schemas.microsoft.com/office/drawing/2014/main" id="{98397998-2CE4-851A-144B-AA5A793F8EEA}"/>
+                <a16:creationId xmlns:a16="http://schemas.microsoft.com/office/drawing/2014/main" id="{22639573-3E2D-4031-1CF4-2EA96107E4C8}"/>
               </a:ext>
             </a:extLst>
           </p:cNvPr>
@@ -3804,7 +3801,7 @@
             <a:hlinkClick r:id="" action="ppaction://media"/>
             <a:extLst>
               <a:ext uri="{FF2B5EF4-FFF2-40B4-BE49-F238E27FC236}">
-                <a16:creationId xmlns:a16="http://schemas.microsoft.com/office/drawing/2014/main" id="{5A2902D0-BF58-F3C7-B8C1-A66AFD4BC08B}"/>
+                <a16:creationId xmlns:a16="http://schemas.microsoft.com/office/drawing/2014/main" id="{F5012090-874D-C0B9-825A-6B8071710F0D}"/>
               </a:ext>
             </a:extLst>
           </p:cNvPr>
@@ -3839,7 +3836,7 @@
     </p:spTree>
     <p:extLst>
       <p:ext uri="{BB962C8B-B14F-4D97-AF65-F5344CB8AC3E}">
-        <p14:creationId xmlns:p14="http://schemas.microsoft.com/office/powerpoint/2010/main" val="1686040564"/>
+        <p14:creationId xmlns:p14="http://schemas.microsoft.com/office/powerpoint/2010/main" val="3138791263"/>
       </p:ext>
     </p:extLst>
   </p:cSld>
@@ -3963,7 +3960,7 @@
           <p:cNvPr id="2" name="テキスト ボックス 1">
             <a:extLst>
               <a:ext uri="{FF2B5EF4-FFF2-40B4-BE49-F238E27FC236}">
-                <a16:creationId xmlns:a16="http://schemas.microsoft.com/office/drawing/2014/main" id="{F536274F-3219-7985-0362-FA3B8635E4D8}"/>
+                <a16:creationId xmlns:a16="http://schemas.microsoft.com/office/drawing/2014/main" id="{4C723D1F-B223-1283-CD5B-E63EE74CB8E2}"/>
               </a:ext>
             </a:extLst>
           </p:cNvPr>
@@ -4009,7 +4006,7 @@
           <p:cNvPr id="3" name="テキスト ボックス 2">
             <a:extLst>
               <a:ext uri="{FF2B5EF4-FFF2-40B4-BE49-F238E27FC236}">
-                <a16:creationId xmlns:a16="http://schemas.microsoft.com/office/drawing/2014/main" id="{E208E1D9-75EE-7D15-BD4E-CB0AE002D609}"/>
+                <a16:creationId xmlns:a16="http://schemas.microsoft.com/office/drawing/2014/main" id="{12BA0869-390D-F2CF-696B-20F9C61B0C93}"/>
               </a:ext>
             </a:extLst>
           </p:cNvPr>
@@ -4033,20 +4030,14 @@
           <a:lstStyle/>
           <a:p>
             <a:r>
-              <a:rPr kumimoji="1" lang="en-US" altLang="ja-JP" sz="3400" b="1">
+              <a:rPr kumimoji="1" lang="ja-JP" altLang="en-US" sz="3400" b="1">
                 <a:solidFill>
                   <a:srgbClr val="111111"/>
                 </a:solidFill>
                 <a:latin typeface="Arial" panose="020B0604020202020204" pitchFamily="34" charset="0"/>
               </a:rPr>
-              <a:t>WHAT DOES IT SOLVE?</a:t>
-            </a:r>
-            <a:endParaRPr kumimoji="1" lang="ja-JP" altLang="en-US" sz="3400" b="1">
-              <a:solidFill>
-                <a:srgbClr val="111111"/>
-              </a:solidFill>
-              <a:latin typeface="Arial" panose="020B0604020202020204" pitchFamily="34" charset="0"/>
-            </a:endParaRPr>
+              <a:t>このプロジェクトは何を解決する？</a:t>
+            </a:r>
           </a:p>
         </p:txBody>
       </p:sp>
@@ -4055,7 +4046,7 @@
           <p:cNvPr id="4" name="テキスト ボックス 3">
             <a:extLst>
               <a:ext uri="{FF2B5EF4-FFF2-40B4-BE49-F238E27FC236}">
-                <a16:creationId xmlns:a16="http://schemas.microsoft.com/office/drawing/2014/main" id="{4FF0D0B5-A8A4-02EE-09E4-3C8D65083037}"/>
+                <a16:creationId xmlns:a16="http://schemas.microsoft.com/office/drawing/2014/main" id="{201858D7-6813-9FB7-0422-4C97BE9BA1AF}"/>
               </a:ext>
             </a:extLst>
           </p:cNvPr>
@@ -4122,7 +4113,7 @@
           <p:cNvPr id="5" name="テキスト ボックス 4">
             <a:extLst>
               <a:ext uri="{FF2B5EF4-FFF2-40B4-BE49-F238E27FC236}">
-                <a16:creationId xmlns:a16="http://schemas.microsoft.com/office/drawing/2014/main" id="{1E6CCD85-0046-ABD3-7F00-13FA8DF98847}"/>
+                <a16:creationId xmlns:a16="http://schemas.microsoft.com/office/drawing/2014/main" id="{25484205-550E-EB8C-E1BB-7DBB70249883}"/>
               </a:ext>
             </a:extLst>
           </p:cNvPr>
@@ -4169,7 +4160,7 @@
             <a:hlinkClick r:id="" action="ppaction://media"/>
             <a:extLst>
               <a:ext uri="{FF2B5EF4-FFF2-40B4-BE49-F238E27FC236}">
-                <a16:creationId xmlns:a16="http://schemas.microsoft.com/office/drawing/2014/main" id="{036B6A32-F2E1-CECE-6565-3C285E7F1A32}"/>
+                <a16:creationId xmlns:a16="http://schemas.microsoft.com/office/drawing/2014/main" id="{4AA935D6-9BBC-1B3E-F904-BAB4A3E4F26F}"/>
               </a:ext>
             </a:extLst>
           </p:cNvPr>
@@ -4204,7 +4195,7 @@
     </p:spTree>
     <p:extLst>
       <p:ext uri="{BB962C8B-B14F-4D97-AF65-F5344CB8AC3E}">
-        <p14:creationId xmlns:p14="http://schemas.microsoft.com/office/powerpoint/2010/main" val="3264689898"/>
+        <p14:creationId xmlns:p14="http://schemas.microsoft.com/office/powerpoint/2010/main" val="4109644675"/>
       </p:ext>
     </p:extLst>
   </p:cSld>
@@ -4328,7 +4319,7 @@
           <p:cNvPr id="2" name="テキスト ボックス 1">
             <a:extLst>
               <a:ext uri="{FF2B5EF4-FFF2-40B4-BE49-F238E27FC236}">
-                <a16:creationId xmlns:a16="http://schemas.microsoft.com/office/drawing/2014/main" id="{5F639A77-C643-9539-EC30-EFD51DE9C982}"/>
+                <a16:creationId xmlns:a16="http://schemas.microsoft.com/office/drawing/2014/main" id="{48BF567D-AAE2-4F6D-13D1-D35D427B7559}"/>
               </a:ext>
             </a:extLst>
           </p:cNvPr>
@@ -4374,7 +4365,7 @@
           <p:cNvPr id="3" name="テキスト ボックス 2">
             <a:extLst>
               <a:ext uri="{FF2B5EF4-FFF2-40B4-BE49-F238E27FC236}">
-                <a16:creationId xmlns:a16="http://schemas.microsoft.com/office/drawing/2014/main" id="{5AAB9E57-18F0-004E-64CE-D2A061005A16}"/>
+                <a16:creationId xmlns:a16="http://schemas.microsoft.com/office/drawing/2014/main" id="{15546B95-1640-BD19-E799-5A2526BA9786}"/>
               </a:ext>
             </a:extLst>
           </p:cNvPr>
@@ -4398,20 +4389,14 @@
           <a:lstStyle/>
           <a:p>
             <a:r>
-              <a:rPr kumimoji="1" lang="en-US" altLang="ja-JP" sz="3400" b="1">
+              <a:rPr kumimoji="1" lang="ja-JP" altLang="en-US" sz="3400" b="1">
                 <a:solidFill>
                   <a:srgbClr val="111111"/>
                 </a:solidFill>
                 <a:latin typeface="Arial" panose="020B0604020202020204" pitchFamily="34" charset="0"/>
               </a:rPr>
-              <a:t>TECH STACK</a:t>
-            </a:r>
-            <a:endParaRPr kumimoji="1" lang="ja-JP" altLang="en-US" sz="3400" b="1">
-              <a:solidFill>
-                <a:srgbClr val="111111"/>
-              </a:solidFill>
-              <a:latin typeface="Arial" panose="020B0604020202020204" pitchFamily="34" charset="0"/>
-            </a:endParaRPr>
+              <a:t>技術スタック</a:t>
+            </a:r>
           </a:p>
         </p:txBody>
       </p:sp>
@@ -4420,7 +4405,7 @@
           <p:cNvPr id="4" name="テキスト ボックス 3">
             <a:extLst>
               <a:ext uri="{FF2B5EF4-FFF2-40B4-BE49-F238E27FC236}">
-                <a16:creationId xmlns:a16="http://schemas.microsoft.com/office/drawing/2014/main" id="{8089F376-1496-2050-FC51-33F9CD7949CE}"/>
+                <a16:creationId xmlns:a16="http://schemas.microsoft.com/office/drawing/2014/main" id="{DC5A9FC6-3988-A14D-84E9-84D3D2363FFD}"/>
               </a:ext>
             </a:extLst>
           </p:cNvPr>
@@ -4430,7 +4415,7 @@
         <p:spPr>
           <a:xfrm>
             <a:off x="533400" y="3429000"/>
-            <a:ext cx="10795000" cy="400110"/>
+            <a:ext cx="10795000" cy="707886"/>
           </a:xfrm>
           <a:prstGeom prst="rect">
             <a:avLst/>
@@ -4444,13 +4429,22 @@
           <a:lstStyle/>
           <a:p>
             <a:r>
+              <a:rPr kumimoji="1" lang="ja-JP" altLang="en-US" sz="2000">
+                <a:solidFill>
+                  <a:srgbClr val="333333"/>
+                </a:solidFill>
+                <a:latin typeface="Arial" panose="020B0604020202020204" pitchFamily="34" charset="0"/>
+              </a:rPr>
+              <a:t>主要技術：</a:t>
+            </a:r>
+            <a:r>
               <a:rPr kumimoji="1" lang="en-US" altLang="ja-JP" sz="2000">
                 <a:solidFill>
                   <a:srgbClr val="333333"/>
                 </a:solidFill>
                 <a:latin typeface="Arial" panose="020B0604020202020204" pitchFamily="34" charset="0"/>
               </a:rPr>
-              <a:t>Primary technologies: TypeScript</a:t>
+              <a:t>TypeScript</a:t>
             </a:r>
             <a:r>
               <a:rPr kumimoji="1" lang="ja-JP" altLang="en-US" sz="2000">
@@ -4468,14 +4462,18 @@
                 </a:solidFill>
                 <a:latin typeface="Arial" panose="020B0604020202020204" pitchFamily="34" charset="0"/>
               </a:rPr>
-              <a:t>JavaScript</a:t>
-            </a:r>
-            <a:endParaRPr kumimoji="1" lang="ja-JP" altLang="en-US" sz="2000">
-              <a:solidFill>
-                <a:srgbClr val="333333"/>
-              </a:solidFill>
-              <a:latin typeface="Arial" panose="020B0604020202020204" pitchFamily="34" charset="0"/>
-            </a:endParaRPr>
+              <a:t>JavaScript
+</a:t>
+            </a:r>
+            <a:r>
+              <a:rPr kumimoji="1" lang="ja-JP" altLang="en-US" sz="2000">
+                <a:solidFill>
+                  <a:srgbClr val="333333"/>
+                </a:solidFill>
+                <a:latin typeface="Arial" panose="020B0604020202020204" pitchFamily="34" charset="0"/>
+              </a:rPr>
+              <a:t>役割を分け、保守しやすい構成を目指しています。</a:t>
+            </a:r>
           </a:p>
         </p:txBody>
       </p:sp>
@@ -4484,7 +4482,7 @@
           <p:cNvPr id="5" name="テキスト ボックス 4">
             <a:extLst>
               <a:ext uri="{FF2B5EF4-FFF2-40B4-BE49-F238E27FC236}">
-                <a16:creationId xmlns:a16="http://schemas.microsoft.com/office/drawing/2014/main" id="{8FDF506E-C2FA-BCB4-C4E9-BDB614CDBC63}"/>
+                <a16:creationId xmlns:a16="http://schemas.microsoft.com/office/drawing/2014/main" id="{0FD0834F-86C1-10F2-4658-7BAF90ED7D89}"/>
               </a:ext>
             </a:extLst>
           </p:cNvPr>
@@ -4531,7 +4529,7 @@
             <a:hlinkClick r:id="" action="ppaction://media"/>
             <a:extLst>
               <a:ext uri="{FF2B5EF4-FFF2-40B4-BE49-F238E27FC236}">
-                <a16:creationId xmlns:a16="http://schemas.microsoft.com/office/drawing/2014/main" id="{B6CA78C0-1069-2374-D23E-E148E6DD30A5}"/>
+                <a16:creationId xmlns:a16="http://schemas.microsoft.com/office/drawing/2014/main" id="{F47E28D7-29D5-2DB0-27A7-9C733CFD4083}"/>
               </a:ext>
             </a:extLst>
           </p:cNvPr>
@@ -4566,7 +4564,7 @@
     </p:spTree>
     <p:extLst>
       <p:ext uri="{BB962C8B-B14F-4D97-AF65-F5344CB8AC3E}">
-        <p14:creationId xmlns:p14="http://schemas.microsoft.com/office/powerpoint/2010/main" val="2497471538"/>
+        <p14:creationId xmlns:p14="http://schemas.microsoft.com/office/powerpoint/2010/main" val="3527958945"/>
       </p:ext>
     </p:extLst>
   </p:cSld>
@@ -4690,7 +4688,7 @@
           <p:cNvPr id="2" name="テキスト ボックス 1">
             <a:extLst>
               <a:ext uri="{FF2B5EF4-FFF2-40B4-BE49-F238E27FC236}">
-                <a16:creationId xmlns:a16="http://schemas.microsoft.com/office/drawing/2014/main" id="{8D29BE95-2BA2-E469-E321-44F070199B12}"/>
+                <a16:creationId xmlns:a16="http://schemas.microsoft.com/office/drawing/2014/main" id="{7508188D-1DD4-A93A-B17A-BAAA697396F6}"/>
               </a:ext>
             </a:extLst>
           </p:cNvPr>
@@ -4736,7 +4734,7 @@
           <p:cNvPr id="3" name="テキスト ボックス 2">
             <a:extLst>
               <a:ext uri="{FF2B5EF4-FFF2-40B4-BE49-F238E27FC236}">
-                <a16:creationId xmlns:a16="http://schemas.microsoft.com/office/drawing/2014/main" id="{88B3D0AF-34D3-5495-6B28-02266F07A8A3}"/>
+                <a16:creationId xmlns:a16="http://schemas.microsoft.com/office/drawing/2014/main" id="{7A1FD800-58BE-77C8-7C39-F8D449BB2B97}"/>
               </a:ext>
             </a:extLst>
           </p:cNvPr>
@@ -4760,20 +4758,14 @@
           <a:lstStyle/>
           <a:p>
             <a:r>
-              <a:rPr kumimoji="1" lang="en-US" altLang="ja-JP" sz="3400" b="1">
+              <a:rPr kumimoji="1" lang="ja-JP" altLang="en-US" sz="3400" b="1">
                 <a:solidFill>
                   <a:srgbClr val="111111"/>
                 </a:solidFill>
                 <a:latin typeface="Arial" panose="020B0604020202020204" pitchFamily="34" charset="0"/>
               </a:rPr>
-              <a:t>REPOSITORY HIGHLIGHTS</a:t>
-            </a:r>
-            <a:endParaRPr kumimoji="1" lang="ja-JP" altLang="en-US" sz="3400" b="1">
-              <a:solidFill>
-                <a:srgbClr val="111111"/>
-              </a:solidFill>
-              <a:latin typeface="Arial" panose="020B0604020202020204" pitchFamily="34" charset="0"/>
-            </a:endParaRPr>
+              <a:t>リポジトリの読みどころ</a:t>
+            </a:r>
           </a:p>
         </p:txBody>
       </p:sp>
@@ -4782,7 +4774,7 @@
           <p:cNvPr id="4" name="テキスト ボックス 3">
             <a:extLst>
               <a:ext uri="{FF2B5EF4-FFF2-40B4-BE49-F238E27FC236}">
-                <a16:creationId xmlns:a16="http://schemas.microsoft.com/office/drawing/2014/main" id="{AB121646-2FDD-6AC4-EFB1-9ED13F3085AE}"/>
+                <a16:creationId xmlns:a16="http://schemas.microsoft.com/office/drawing/2014/main" id="{EB431EBA-BA32-16E5-A275-349933514F0A}"/>
               </a:ext>
             </a:extLst>
           </p:cNvPr>
@@ -4792,7 +4784,7 @@
         <p:spPr>
           <a:xfrm>
             <a:off x="533400" y="3429000"/>
-            <a:ext cx="10795000" cy="400110"/>
+            <a:ext cx="10795000" cy="707886"/>
           </a:xfrm>
           <a:prstGeom prst="rect">
             <a:avLst/>
@@ -4806,13 +4798,77 @@
           <a:lstStyle/>
           <a:p>
             <a:r>
+              <a:rPr kumimoji="1" lang="ja-JP" altLang="en-US" sz="2000">
+                <a:solidFill>
+                  <a:srgbClr val="333333"/>
+                </a:solidFill>
+                <a:latin typeface="Arial" panose="020B0604020202020204" pitchFamily="34" charset="0"/>
+              </a:rPr>
+              <a:t>公開コード、</a:t>
+            </a:r>
+            <a:r>
               <a:rPr kumimoji="1" lang="en-US" altLang="ja-JP" sz="2000">
                 <a:solidFill>
                   <a:srgbClr val="333333"/>
                 </a:solidFill>
                 <a:latin typeface="Arial" panose="020B0604020202020204" pitchFamily="34" charset="0"/>
               </a:rPr>
-              <a:t>Public source code, README and commit history reveal the design decisions.</a:t>
+              <a:t>README</a:t>
+            </a:r>
+            <a:r>
+              <a:rPr kumimoji="1" lang="ja-JP" altLang="en-US" sz="2000">
+                <a:solidFill>
+                  <a:srgbClr val="333333"/>
+                </a:solidFill>
+                <a:latin typeface="Arial" panose="020B0604020202020204" pitchFamily="34" charset="0"/>
+              </a:rPr>
+              <a:t>、コミット履歴から設計判断を確認できます。
+主なファイル：</a:t>
+            </a:r>
+            <a:r>
+              <a:rPr kumimoji="1" lang="en-US" altLang="ja-JP" sz="2000">
+                <a:solidFill>
+                  <a:srgbClr val="333333"/>
+                </a:solidFill>
+                <a:latin typeface="Arial" panose="020B0604020202020204" pitchFamily="34" charset="0"/>
+              </a:rPr>
+              <a:t>README.md</a:t>
+            </a:r>
+            <a:r>
+              <a:rPr kumimoji="1" lang="ja-JP" altLang="en-US" sz="2000">
+                <a:solidFill>
+                  <a:srgbClr val="333333"/>
+                </a:solidFill>
+                <a:latin typeface="Arial" panose="020B0604020202020204" pitchFamily="34" charset="0"/>
+              </a:rPr>
+              <a:t>、</a:t>
+            </a:r>
+            <a:r>
+              <a:rPr kumimoji="1" lang="en-US" altLang="ja-JP" sz="2000">
+                <a:solidFill>
+                  <a:srgbClr val="333333"/>
+                </a:solidFill>
+                <a:latin typeface="Arial" panose="020B0604020202020204" pitchFamily="34" charset="0"/>
+              </a:rPr>
+              <a:t>app</a:t>
+            </a:r>
+            <a:r>
+              <a:rPr kumimoji="1" lang="ja-JP" altLang="en-US" sz="2000">
+                <a:solidFill>
+                  <a:srgbClr val="333333"/>
+                </a:solidFill>
+                <a:latin typeface="Arial" panose="020B0604020202020204" pitchFamily="34" charset="0"/>
+              </a:rPr>
+              <a:t>、</a:t>
+            </a:r>
+            <a:r>
+              <a:rPr kumimoji="1" lang="en-US" altLang="ja-JP" sz="2000">
+                <a:solidFill>
+                  <a:srgbClr val="333333"/>
+                </a:solidFill>
+                <a:latin typeface="Arial" panose="020B0604020202020204" pitchFamily="34" charset="0"/>
+              </a:rPr>
+              <a:t>build</a:t>
             </a:r>
             <a:endParaRPr kumimoji="1" lang="ja-JP" altLang="en-US" sz="2000">
               <a:solidFill>
@@ -4828,7 +4884,7 @@
           <p:cNvPr id="5" name="テキスト ボックス 4">
             <a:extLst>
               <a:ext uri="{FF2B5EF4-FFF2-40B4-BE49-F238E27FC236}">
-                <a16:creationId xmlns:a16="http://schemas.microsoft.com/office/drawing/2014/main" id="{41440493-7C4D-0138-583C-9220A1225707}"/>
+                <a16:creationId xmlns:a16="http://schemas.microsoft.com/office/drawing/2014/main" id="{70B2BF10-AE4D-FA7D-CE08-3043D02A901E}"/>
               </a:ext>
             </a:extLst>
           </p:cNvPr>
@@ -4875,7 +4931,7 @@
             <a:hlinkClick r:id="" action="ppaction://media"/>
             <a:extLst>
               <a:ext uri="{FF2B5EF4-FFF2-40B4-BE49-F238E27FC236}">
-                <a16:creationId xmlns:a16="http://schemas.microsoft.com/office/drawing/2014/main" id="{D68F4B97-AD31-4093-55E8-70651775443D}"/>
+                <a16:creationId xmlns:a16="http://schemas.microsoft.com/office/drawing/2014/main" id="{1BE602F6-5061-3184-939F-07D59E597CB6}"/>
               </a:ext>
             </a:extLst>
           </p:cNvPr>
@@ -4910,7 +4966,7 @@
     </p:spTree>
     <p:extLst>
       <p:ext uri="{BB962C8B-B14F-4D97-AF65-F5344CB8AC3E}">
-        <p14:creationId xmlns:p14="http://schemas.microsoft.com/office/powerpoint/2010/main" val="2001324796"/>
+        <p14:creationId xmlns:p14="http://schemas.microsoft.com/office/powerpoint/2010/main" val="973731837"/>
       </p:ext>
     </p:extLst>
   </p:cSld>
@@ -5034,7 +5090,7 @@
           <p:cNvPr id="2" name="テキスト ボックス 1">
             <a:extLst>
               <a:ext uri="{FF2B5EF4-FFF2-40B4-BE49-F238E27FC236}">
-                <a16:creationId xmlns:a16="http://schemas.microsoft.com/office/drawing/2014/main" id="{5407CF16-B958-53AC-831F-4DF7FF423AAB}"/>
+                <a16:creationId xmlns:a16="http://schemas.microsoft.com/office/drawing/2014/main" id="{1A439FCD-0B00-6507-E7F0-074F6CC3DF72}"/>
               </a:ext>
             </a:extLst>
           </p:cNvPr>
@@ -5080,7 +5136,7 @@
           <p:cNvPr id="3" name="テキスト ボックス 2">
             <a:extLst>
               <a:ext uri="{FF2B5EF4-FFF2-40B4-BE49-F238E27FC236}">
-                <a16:creationId xmlns:a16="http://schemas.microsoft.com/office/drawing/2014/main" id="{5CBAE6E2-77C0-B8B7-7BC8-8AC880E6D44F}"/>
+                <a16:creationId xmlns:a16="http://schemas.microsoft.com/office/drawing/2014/main" id="{4921F7E0-FABF-C00C-1BC0-F7621EEC53CE}"/>
               </a:ext>
             </a:extLst>
           </p:cNvPr>
@@ -5104,20 +5160,14 @@
           <a:lstStyle/>
           <a:p>
             <a:r>
-              <a:rPr kumimoji="1" lang="en-US" altLang="ja-JP" sz="3400" b="1">
+              <a:rPr kumimoji="1" lang="ja-JP" altLang="en-US" sz="3400" b="1">
                 <a:solidFill>
                   <a:srgbClr val="111111"/>
                 </a:solidFill>
                 <a:latin typeface="Arial" panose="020B0604020202020204" pitchFamily="34" charset="0"/>
               </a:rPr>
-              <a:t>ITERATIVE IMPROVEMENT</a:t>
-            </a:r>
-            <a:endParaRPr kumimoji="1" lang="ja-JP" altLang="en-US" sz="3400" b="1">
-              <a:solidFill>
-                <a:srgbClr val="111111"/>
-              </a:solidFill>
-              <a:latin typeface="Arial" panose="020B0604020202020204" pitchFamily="34" charset="0"/>
-            </a:endParaRPr>
+              <a:t>コミットから分かる改善</a:t>
+            </a:r>
           </a:p>
         </p:txBody>
       </p:sp>
@@ -5126,7 +5176,7 @@
           <p:cNvPr id="4" name="テキスト ボックス 3">
             <a:extLst>
               <a:ext uri="{FF2B5EF4-FFF2-40B4-BE49-F238E27FC236}">
-                <a16:creationId xmlns:a16="http://schemas.microsoft.com/office/drawing/2014/main" id="{1AE28B7E-6A65-2DC3-285F-A8570CF91F88}"/>
+                <a16:creationId xmlns:a16="http://schemas.microsoft.com/office/drawing/2014/main" id="{A5AF9B57-1EFA-4158-5B9D-5F359A95A93A}"/>
               </a:ext>
             </a:extLst>
           </p:cNvPr>
@@ -5156,7 +5206,7 @@
                 </a:solidFill>
                 <a:latin typeface="Arial" panose="020B0604020202020204" pitchFamily="34" charset="0"/>
               </a:rPr>
-              <a:t>Small commits continuously improve features, quality and release readiness.</a:t>
+              <a:t>Configure Sites hosting</a:t>
             </a:r>
             <a:endParaRPr kumimoji="1" lang="ja-JP" altLang="en-US" sz="2000">
               <a:solidFill>
@@ -5172,7 +5222,7 @@
           <p:cNvPr id="5" name="テキスト ボックス 4">
             <a:extLst>
               <a:ext uri="{FF2B5EF4-FFF2-40B4-BE49-F238E27FC236}">
-                <a16:creationId xmlns:a16="http://schemas.microsoft.com/office/drawing/2014/main" id="{F892E92C-9D00-9A0D-EE1B-47D1D818DF45}"/>
+                <a16:creationId xmlns:a16="http://schemas.microsoft.com/office/drawing/2014/main" id="{DACCC52E-E190-F779-32FD-3520E13CD6EF}"/>
               </a:ext>
             </a:extLst>
           </p:cNvPr>
@@ -5219,7 +5269,7 @@
             <a:hlinkClick r:id="" action="ppaction://media"/>
             <a:extLst>
               <a:ext uri="{FF2B5EF4-FFF2-40B4-BE49-F238E27FC236}">
-                <a16:creationId xmlns:a16="http://schemas.microsoft.com/office/drawing/2014/main" id="{86869E34-A3FF-A4F0-1F57-D0A6065913C7}"/>
+                <a16:creationId xmlns:a16="http://schemas.microsoft.com/office/drawing/2014/main" id="{E2A72A59-74D4-F6DD-D875-6E912CE3EA3D}"/>
               </a:ext>
             </a:extLst>
           </p:cNvPr>
@@ -5254,7 +5304,7 @@
     </p:spTree>
     <p:extLst>
       <p:ext uri="{BB962C8B-B14F-4D97-AF65-F5344CB8AC3E}">
-        <p14:creationId xmlns:p14="http://schemas.microsoft.com/office/powerpoint/2010/main" val="1657661945"/>
+        <p14:creationId xmlns:p14="http://schemas.microsoft.com/office/powerpoint/2010/main" val="2853462024"/>
       </p:ext>
     </p:extLst>
   </p:cSld>
@@ -5378,7 +5428,7 @@
           <p:cNvPr id="2" name="テキスト ボックス 1">
             <a:extLst>
               <a:ext uri="{FF2B5EF4-FFF2-40B4-BE49-F238E27FC236}">
-                <a16:creationId xmlns:a16="http://schemas.microsoft.com/office/drawing/2014/main" id="{62D68755-04B0-9E91-17CD-985DAE01A584}"/>
+                <a16:creationId xmlns:a16="http://schemas.microsoft.com/office/drawing/2014/main" id="{8464433E-70BA-4E3F-0E12-10EE520ACEDE}"/>
               </a:ext>
             </a:extLst>
           </p:cNvPr>
@@ -5424,7 +5474,7 @@
           <p:cNvPr id="3" name="テキスト ボックス 2">
             <a:extLst>
               <a:ext uri="{FF2B5EF4-FFF2-40B4-BE49-F238E27FC236}">
-                <a16:creationId xmlns:a16="http://schemas.microsoft.com/office/drawing/2014/main" id="{3799B031-6552-E357-15F2-6B671ACCAE82}"/>
+                <a16:creationId xmlns:a16="http://schemas.microsoft.com/office/drawing/2014/main" id="{20F75D29-517B-2D62-5B7E-29FD23954DEA}"/>
               </a:ext>
             </a:extLst>
           </p:cNvPr>
@@ -5448,20 +5498,14 @@
           <a:lstStyle/>
           <a:p>
             <a:r>
-              <a:rPr kumimoji="1" lang="en-US" altLang="ja-JP" sz="3400" b="1">
+              <a:rPr kumimoji="1" lang="ja-JP" altLang="en-US" sz="3400" b="1">
                 <a:solidFill>
                   <a:srgbClr val="111111"/>
                 </a:solidFill>
                 <a:latin typeface="Arial" panose="020B0604020202020204" pitchFamily="34" charset="0"/>
               </a:rPr>
-              <a:t>READ THE FULL ARTICLE</a:t>
-            </a:r>
-            <a:endParaRPr kumimoji="1" lang="ja-JP" altLang="en-US" sz="3400" b="1">
-              <a:solidFill>
-                <a:srgbClr val="111111"/>
-              </a:solidFill>
-              <a:latin typeface="Arial" panose="020B0604020202020204" pitchFamily="34" charset="0"/>
-            </a:endParaRPr>
+              <a:t>詳しくは積み上げログへ</a:t>
+            </a:r>
           </a:p>
         </p:txBody>
       </p:sp>
@@ -5470,7 +5514,7 @@
           <p:cNvPr id="4" name="テキスト ボックス 3">
             <a:extLst>
               <a:ext uri="{FF2B5EF4-FFF2-40B4-BE49-F238E27FC236}">
-                <a16:creationId xmlns:a16="http://schemas.microsoft.com/office/drawing/2014/main" id="{E27292A4-9832-9FC9-0705-389FC9444ADA}"/>
+                <a16:creationId xmlns:a16="http://schemas.microsoft.com/office/drawing/2014/main" id="{88DCC3ED-6A34-34EF-6EE6-E1DA8DE93347}"/>
               </a:ext>
             </a:extLst>
           </p:cNvPr>
@@ -5494,14 +5538,32 @@
           <a:lstStyle/>
           <a:p>
             <a:r>
-              <a:rPr kumimoji="1" lang="sv-SE" altLang="ja-JP" sz="2000">
+              <a:rPr kumimoji="1" lang="zh-TW" altLang="en-US" sz="2000">
+                <a:solidFill>
+                  <a:srgbClr val="333333"/>
+                </a:solidFill>
+                <a:latin typeface="Arial" panose="020B0604020202020204" pitchFamily="34" charset="0"/>
+              </a:rPr>
+              <a:t>記事： </a:t>
+            </a:r>
+            <a:r>
+              <a:rPr kumimoji="1" lang="en-US" altLang="zh-TW" sz="2000">
                 <a:solidFill>
                   <a:srgbClr val="333333"/>
                 </a:solidFill>
                 <a:latin typeface="Arial" panose="020B0604020202020204" pitchFamily="34" charset="0"/>
               </a:rPr>
               <a:t>https://syunnjack.dev/articles/miseoshi-web
-TSUMIAGE LOG</a:t>
+</a:t>
+            </a:r>
+            <a:r>
+              <a:rPr kumimoji="1" lang="zh-TW" altLang="en-US" sz="2000">
+                <a:solidFill>
+                  <a:srgbClr val="333333"/>
+                </a:solidFill>
+                <a:latin typeface="Arial" panose="020B0604020202020204" pitchFamily="34" charset="0"/>
+              </a:rPr>
+              <a:t>学び、作り、振り返る開発記録。</a:t>
             </a:r>
             <a:endParaRPr kumimoji="1" lang="ja-JP" altLang="en-US" sz="2000">
               <a:solidFill>
@@ -5517,7 +5579,7 @@
           <p:cNvPr id="5" name="テキスト ボックス 4">
             <a:extLst>
               <a:ext uri="{FF2B5EF4-FFF2-40B4-BE49-F238E27FC236}">
-                <a16:creationId xmlns:a16="http://schemas.microsoft.com/office/drawing/2014/main" id="{E4CEA9B9-AA3C-48E7-E84E-B64AE16F36A0}"/>
+                <a16:creationId xmlns:a16="http://schemas.microsoft.com/office/drawing/2014/main" id="{5EE0032A-764A-6B07-F126-0501AB1B0A55}"/>
               </a:ext>
             </a:extLst>
           </p:cNvPr>
@@ -5564,7 +5626,7 @@
             <a:hlinkClick r:id="" action="ppaction://media"/>
             <a:extLst>
               <a:ext uri="{FF2B5EF4-FFF2-40B4-BE49-F238E27FC236}">
-                <a16:creationId xmlns:a16="http://schemas.microsoft.com/office/drawing/2014/main" id="{9C3C0E9D-E236-F3CD-6874-B1957F67DC09}"/>
+                <a16:creationId xmlns:a16="http://schemas.microsoft.com/office/drawing/2014/main" id="{330CCF8F-DF1D-7AA7-9D81-1DB58E737811}"/>
               </a:ext>
             </a:extLst>
           </p:cNvPr>
@@ -5599,7 +5661,7 @@
     </p:spTree>
     <p:extLst>
       <p:ext uri="{BB962C8B-B14F-4D97-AF65-F5344CB8AC3E}">
-        <p14:creationId xmlns:p14="http://schemas.microsoft.com/office/powerpoint/2010/main" val="3380211029"/>
+        <p14:creationId xmlns:p14="http://schemas.microsoft.com/office/powerpoint/2010/main" val="1550441332"/>
       </p:ext>
     </p:extLst>
   </p:cSld>

--- a/public/videos/repositories/miseoshi-web/miseoshi-web-tech-preview.pptx
+++ b/public/videos/repositories/miseoshi-web/miseoshi-web-tech-preview.pptx
@@ -134,7 +134,7 @@
           <p:cNvPr id="2" name="タイトル 1">
             <a:extLst>
               <a:ext uri="{FF2B5EF4-FFF2-40B4-BE49-F238E27FC236}">
-                <a16:creationId xmlns:a16="http://schemas.microsoft.com/office/drawing/2014/main" id="{95F050A2-44CA-E62F-CDFF-6251ECA22464}"/>
+                <a16:creationId xmlns:a16="http://schemas.microsoft.com/office/drawing/2014/main" id="{F54260EE-C55E-5904-4220-3764FE48B7D7}"/>
               </a:ext>
             </a:extLst>
           </p:cNvPr>
@@ -171,7 +171,7 @@
           <p:cNvPr id="3" name="字幕 2">
             <a:extLst>
               <a:ext uri="{FF2B5EF4-FFF2-40B4-BE49-F238E27FC236}">
-                <a16:creationId xmlns:a16="http://schemas.microsoft.com/office/drawing/2014/main" id="{560BF138-F8A4-42C1-ACFD-95EEB6D3F121}"/>
+                <a16:creationId xmlns:a16="http://schemas.microsoft.com/office/drawing/2014/main" id="{B142A96A-C43B-BFAB-A861-858F2E4889B3}"/>
               </a:ext>
             </a:extLst>
           </p:cNvPr>
@@ -241,7 +241,7 @@
           <p:cNvPr id="4" name="日付プレースホルダー 3">
             <a:extLst>
               <a:ext uri="{FF2B5EF4-FFF2-40B4-BE49-F238E27FC236}">
-                <a16:creationId xmlns:a16="http://schemas.microsoft.com/office/drawing/2014/main" id="{40F847AF-7227-D1C9-8FB6-E13C58133A26}"/>
+                <a16:creationId xmlns:a16="http://schemas.microsoft.com/office/drawing/2014/main" id="{D955174E-07DC-AC39-A183-3A19757498D7}"/>
               </a:ext>
             </a:extLst>
           </p:cNvPr>
@@ -257,7 +257,7 @@
           <a:bodyPr/>
           <a:lstStyle/>
           <a:p>
-            <a:fld id="{4B28C2A7-CA13-47F5-B31F-225FA1F55699}" type="datetimeFigureOut">
+            <a:fld id="{14DDE639-C3EF-41F0-AB3C-A9D5D71B1469}" type="datetimeFigureOut">
               <a:rPr kumimoji="1" lang="ja-JP" altLang="en-US" smtClean="0"/>
               <a:t>2026/7/30</a:t>
             </a:fld>
@@ -270,7 +270,7 @@
           <p:cNvPr id="5" name="フッター プレースホルダー 4">
             <a:extLst>
               <a:ext uri="{FF2B5EF4-FFF2-40B4-BE49-F238E27FC236}">
-                <a16:creationId xmlns:a16="http://schemas.microsoft.com/office/drawing/2014/main" id="{AF9BC765-C2AB-EF57-E216-4BC7F4BF1E58}"/>
+                <a16:creationId xmlns:a16="http://schemas.microsoft.com/office/drawing/2014/main" id="{E85819C7-3A7E-A10A-C086-75BDEEC32A75}"/>
               </a:ext>
             </a:extLst>
           </p:cNvPr>
@@ -295,7 +295,7 @@
           <p:cNvPr id="6" name="スライド番号プレースホルダー 5">
             <a:extLst>
               <a:ext uri="{FF2B5EF4-FFF2-40B4-BE49-F238E27FC236}">
-                <a16:creationId xmlns:a16="http://schemas.microsoft.com/office/drawing/2014/main" id="{27AAA27D-4F47-DF2A-EF7C-866D99A118A0}"/>
+                <a16:creationId xmlns:a16="http://schemas.microsoft.com/office/drawing/2014/main" id="{BBCDD367-7BAB-F1CE-1FC1-C034CA1CDDD9}"/>
               </a:ext>
             </a:extLst>
           </p:cNvPr>
@@ -311,7 +311,7 @@
           <a:bodyPr/>
           <a:lstStyle/>
           <a:p>
-            <a:fld id="{8C32973D-27DF-4F5A-A2A7-205083D74E96}" type="slidenum">
+            <a:fld id="{5974C1DC-7BE4-4B0B-BF3B-6F3C8A296CFC}" type="slidenum">
               <a:rPr kumimoji="1" lang="ja-JP" altLang="en-US" smtClean="0"/>
               <a:t>‹#›</a:t>
             </a:fld>
@@ -322,7 +322,7 @@
     </p:spTree>
     <p:extLst>
       <p:ext uri="{BB962C8B-B14F-4D97-AF65-F5344CB8AC3E}">
-        <p14:creationId xmlns:p14="http://schemas.microsoft.com/office/powerpoint/2010/main" val="932875465"/>
+        <p14:creationId xmlns:p14="http://schemas.microsoft.com/office/powerpoint/2010/main" val="49137831"/>
       </p:ext>
     </p:extLst>
   </p:cSld>
@@ -354,7 +354,7 @@
           <p:cNvPr id="2" name="タイトル 1">
             <a:extLst>
               <a:ext uri="{FF2B5EF4-FFF2-40B4-BE49-F238E27FC236}">
-                <a16:creationId xmlns:a16="http://schemas.microsoft.com/office/drawing/2014/main" id="{E47C881C-9952-C226-AC2E-480C112F5F86}"/>
+                <a16:creationId xmlns:a16="http://schemas.microsoft.com/office/drawing/2014/main" id="{5F9A8B05-5859-B78C-3013-8BBD215A9410}"/>
               </a:ext>
             </a:extLst>
           </p:cNvPr>
@@ -382,7 +382,7 @@
           <p:cNvPr id="3" name="縦書きテキスト プレースホルダー 2">
             <a:extLst>
               <a:ext uri="{FF2B5EF4-FFF2-40B4-BE49-F238E27FC236}">
-                <a16:creationId xmlns:a16="http://schemas.microsoft.com/office/drawing/2014/main" id="{E5E5C0D5-C953-FFA8-A636-93E1210B1367}"/>
+                <a16:creationId xmlns:a16="http://schemas.microsoft.com/office/drawing/2014/main" id="{4B768110-C479-7FB2-2BA8-C21FCD11F173}"/>
               </a:ext>
             </a:extLst>
           </p:cNvPr>
@@ -471,7 +471,7 @@
           <p:cNvPr id="4" name="日付プレースホルダー 3">
             <a:extLst>
               <a:ext uri="{FF2B5EF4-FFF2-40B4-BE49-F238E27FC236}">
-                <a16:creationId xmlns:a16="http://schemas.microsoft.com/office/drawing/2014/main" id="{2A6DAD5F-61FB-B175-BD86-F790EA50DD53}"/>
+                <a16:creationId xmlns:a16="http://schemas.microsoft.com/office/drawing/2014/main" id="{8BC419C4-716C-98ED-A56A-D00ECA6064AF}"/>
               </a:ext>
             </a:extLst>
           </p:cNvPr>
@@ -487,7 +487,7 @@
           <a:bodyPr/>
           <a:lstStyle/>
           <a:p>
-            <a:fld id="{4B28C2A7-CA13-47F5-B31F-225FA1F55699}" type="datetimeFigureOut">
+            <a:fld id="{14DDE639-C3EF-41F0-AB3C-A9D5D71B1469}" type="datetimeFigureOut">
               <a:rPr kumimoji="1" lang="ja-JP" altLang="en-US" smtClean="0"/>
               <a:t>2026/7/30</a:t>
             </a:fld>
@@ -500,7 +500,7 @@
           <p:cNvPr id="5" name="フッター プレースホルダー 4">
             <a:extLst>
               <a:ext uri="{FF2B5EF4-FFF2-40B4-BE49-F238E27FC236}">
-                <a16:creationId xmlns:a16="http://schemas.microsoft.com/office/drawing/2014/main" id="{BF9FEA11-CE0A-A779-DB08-73AD081D815C}"/>
+                <a16:creationId xmlns:a16="http://schemas.microsoft.com/office/drawing/2014/main" id="{E2177F96-6AD6-35AB-454C-C89086DAB605}"/>
               </a:ext>
             </a:extLst>
           </p:cNvPr>
@@ -525,7 +525,7 @@
           <p:cNvPr id="6" name="スライド番号プレースホルダー 5">
             <a:extLst>
               <a:ext uri="{FF2B5EF4-FFF2-40B4-BE49-F238E27FC236}">
-                <a16:creationId xmlns:a16="http://schemas.microsoft.com/office/drawing/2014/main" id="{C7822E46-1011-385B-0799-66021B86DC34}"/>
+                <a16:creationId xmlns:a16="http://schemas.microsoft.com/office/drawing/2014/main" id="{F3E9A3CB-36E0-BA66-EA24-10B9F14CBC98}"/>
               </a:ext>
             </a:extLst>
           </p:cNvPr>
@@ -541,7 +541,7 @@
           <a:bodyPr/>
           <a:lstStyle/>
           <a:p>
-            <a:fld id="{8C32973D-27DF-4F5A-A2A7-205083D74E96}" type="slidenum">
+            <a:fld id="{5974C1DC-7BE4-4B0B-BF3B-6F3C8A296CFC}" type="slidenum">
               <a:rPr kumimoji="1" lang="ja-JP" altLang="en-US" smtClean="0"/>
               <a:t>‹#›</a:t>
             </a:fld>
@@ -552,7 +552,7 @@
     </p:spTree>
     <p:extLst>
       <p:ext uri="{BB962C8B-B14F-4D97-AF65-F5344CB8AC3E}">
-        <p14:creationId xmlns:p14="http://schemas.microsoft.com/office/powerpoint/2010/main" val="3851637660"/>
+        <p14:creationId xmlns:p14="http://schemas.microsoft.com/office/powerpoint/2010/main" val="3960116673"/>
       </p:ext>
     </p:extLst>
   </p:cSld>
@@ -584,7 +584,7 @@
           <p:cNvPr id="2" name="縦書きタイトル 1">
             <a:extLst>
               <a:ext uri="{FF2B5EF4-FFF2-40B4-BE49-F238E27FC236}">
-                <a16:creationId xmlns:a16="http://schemas.microsoft.com/office/drawing/2014/main" id="{02677F8C-74F0-3DFD-4D04-438DBA9F408F}"/>
+                <a16:creationId xmlns:a16="http://schemas.microsoft.com/office/drawing/2014/main" id="{05FD5E0C-3F43-374D-C180-CB5B1BA11F2E}"/>
               </a:ext>
             </a:extLst>
           </p:cNvPr>
@@ -617,7 +617,7 @@
           <p:cNvPr id="3" name="縦書きテキスト プレースホルダー 2">
             <a:extLst>
               <a:ext uri="{FF2B5EF4-FFF2-40B4-BE49-F238E27FC236}">
-                <a16:creationId xmlns:a16="http://schemas.microsoft.com/office/drawing/2014/main" id="{009F56AC-8812-0A16-BE37-1D526D44549B}"/>
+                <a16:creationId xmlns:a16="http://schemas.microsoft.com/office/drawing/2014/main" id="{AB6653E2-FD6C-D048-3655-7004EF8C054C}"/>
               </a:ext>
             </a:extLst>
           </p:cNvPr>
@@ -711,7 +711,7 @@
           <p:cNvPr id="4" name="日付プレースホルダー 3">
             <a:extLst>
               <a:ext uri="{FF2B5EF4-FFF2-40B4-BE49-F238E27FC236}">
-                <a16:creationId xmlns:a16="http://schemas.microsoft.com/office/drawing/2014/main" id="{420013DD-E63B-B017-3110-58D44EEDA7B0}"/>
+                <a16:creationId xmlns:a16="http://schemas.microsoft.com/office/drawing/2014/main" id="{D1FB3BD1-E46F-D403-8977-5878F3B6333C}"/>
               </a:ext>
             </a:extLst>
           </p:cNvPr>
@@ -727,7 +727,7 @@
           <a:bodyPr/>
           <a:lstStyle/>
           <a:p>
-            <a:fld id="{4B28C2A7-CA13-47F5-B31F-225FA1F55699}" type="datetimeFigureOut">
+            <a:fld id="{14DDE639-C3EF-41F0-AB3C-A9D5D71B1469}" type="datetimeFigureOut">
               <a:rPr kumimoji="1" lang="ja-JP" altLang="en-US" smtClean="0"/>
               <a:t>2026/7/30</a:t>
             </a:fld>
@@ -740,7 +740,7 @@
           <p:cNvPr id="5" name="フッター プレースホルダー 4">
             <a:extLst>
               <a:ext uri="{FF2B5EF4-FFF2-40B4-BE49-F238E27FC236}">
-                <a16:creationId xmlns:a16="http://schemas.microsoft.com/office/drawing/2014/main" id="{BFC19EFC-131B-42B0-FCD7-B4CC0E6621C7}"/>
+                <a16:creationId xmlns:a16="http://schemas.microsoft.com/office/drawing/2014/main" id="{2B158A4C-4D0F-31DF-BD53-CE9DE428F6BC}"/>
               </a:ext>
             </a:extLst>
           </p:cNvPr>
@@ -765,7 +765,7 @@
           <p:cNvPr id="6" name="スライド番号プレースホルダー 5">
             <a:extLst>
               <a:ext uri="{FF2B5EF4-FFF2-40B4-BE49-F238E27FC236}">
-                <a16:creationId xmlns:a16="http://schemas.microsoft.com/office/drawing/2014/main" id="{8B3C8A2D-6033-1F04-881F-3ECBA3539BA2}"/>
+                <a16:creationId xmlns:a16="http://schemas.microsoft.com/office/drawing/2014/main" id="{87DFB812-57F7-7A76-1FBD-E0008C81C151}"/>
               </a:ext>
             </a:extLst>
           </p:cNvPr>
@@ -781,7 +781,7 @@
           <a:bodyPr/>
           <a:lstStyle/>
           <a:p>
-            <a:fld id="{8C32973D-27DF-4F5A-A2A7-205083D74E96}" type="slidenum">
+            <a:fld id="{5974C1DC-7BE4-4B0B-BF3B-6F3C8A296CFC}" type="slidenum">
               <a:rPr kumimoji="1" lang="ja-JP" altLang="en-US" smtClean="0"/>
               <a:t>‹#›</a:t>
             </a:fld>
@@ -792,7 +792,7 @@
     </p:spTree>
     <p:extLst>
       <p:ext uri="{BB962C8B-B14F-4D97-AF65-F5344CB8AC3E}">
-        <p14:creationId xmlns:p14="http://schemas.microsoft.com/office/powerpoint/2010/main" val="1941590075"/>
+        <p14:creationId xmlns:p14="http://schemas.microsoft.com/office/powerpoint/2010/main" val="2362473628"/>
       </p:ext>
     </p:extLst>
   </p:cSld>
@@ -824,7 +824,7 @@
           <p:cNvPr id="2" name="タイトル 1">
             <a:extLst>
               <a:ext uri="{FF2B5EF4-FFF2-40B4-BE49-F238E27FC236}">
-                <a16:creationId xmlns:a16="http://schemas.microsoft.com/office/drawing/2014/main" id="{20B772A8-2013-F9BB-36A6-142C26B293EB}"/>
+                <a16:creationId xmlns:a16="http://schemas.microsoft.com/office/drawing/2014/main" id="{33F09689-976A-75D7-4FDD-A53E06ED7872}"/>
               </a:ext>
             </a:extLst>
           </p:cNvPr>
@@ -852,7 +852,7 @@
           <p:cNvPr id="3" name="コンテンツ プレースホルダー 2">
             <a:extLst>
               <a:ext uri="{FF2B5EF4-FFF2-40B4-BE49-F238E27FC236}">
-                <a16:creationId xmlns:a16="http://schemas.microsoft.com/office/drawing/2014/main" id="{FEECFA10-27D4-AA2F-2E80-C95E3CBE62B8}"/>
+                <a16:creationId xmlns:a16="http://schemas.microsoft.com/office/drawing/2014/main" id="{E8966026-57EC-6864-FF2E-007B1F3DD91C}"/>
               </a:ext>
             </a:extLst>
           </p:cNvPr>
@@ -941,7 +941,7 @@
           <p:cNvPr id="4" name="日付プレースホルダー 3">
             <a:extLst>
               <a:ext uri="{FF2B5EF4-FFF2-40B4-BE49-F238E27FC236}">
-                <a16:creationId xmlns:a16="http://schemas.microsoft.com/office/drawing/2014/main" id="{06BB6EB8-1844-C4B5-6BE9-484AB4E671DF}"/>
+                <a16:creationId xmlns:a16="http://schemas.microsoft.com/office/drawing/2014/main" id="{2F5E956D-7818-C984-B0C5-4277B323ADA4}"/>
               </a:ext>
             </a:extLst>
           </p:cNvPr>
@@ -957,7 +957,7 @@
           <a:bodyPr/>
           <a:lstStyle/>
           <a:p>
-            <a:fld id="{4B28C2A7-CA13-47F5-B31F-225FA1F55699}" type="datetimeFigureOut">
+            <a:fld id="{14DDE639-C3EF-41F0-AB3C-A9D5D71B1469}" type="datetimeFigureOut">
               <a:rPr kumimoji="1" lang="ja-JP" altLang="en-US" smtClean="0"/>
               <a:t>2026/7/30</a:t>
             </a:fld>
@@ -970,7 +970,7 @@
           <p:cNvPr id="5" name="フッター プレースホルダー 4">
             <a:extLst>
               <a:ext uri="{FF2B5EF4-FFF2-40B4-BE49-F238E27FC236}">
-                <a16:creationId xmlns:a16="http://schemas.microsoft.com/office/drawing/2014/main" id="{D5CDF098-3F4E-8088-4313-B36E72114665}"/>
+                <a16:creationId xmlns:a16="http://schemas.microsoft.com/office/drawing/2014/main" id="{BAA84064-6FFF-A324-F5A8-7E480E03F68F}"/>
               </a:ext>
             </a:extLst>
           </p:cNvPr>
@@ -995,7 +995,7 @@
           <p:cNvPr id="6" name="スライド番号プレースホルダー 5">
             <a:extLst>
               <a:ext uri="{FF2B5EF4-FFF2-40B4-BE49-F238E27FC236}">
-                <a16:creationId xmlns:a16="http://schemas.microsoft.com/office/drawing/2014/main" id="{9443B275-9F42-68F8-BE82-5ECBF12F9B58}"/>
+                <a16:creationId xmlns:a16="http://schemas.microsoft.com/office/drawing/2014/main" id="{99B3A6AE-D3AC-E640-5D30-C99F204130DE}"/>
               </a:ext>
             </a:extLst>
           </p:cNvPr>
@@ -1011,7 +1011,7 @@
           <a:bodyPr/>
           <a:lstStyle/>
           <a:p>
-            <a:fld id="{8C32973D-27DF-4F5A-A2A7-205083D74E96}" type="slidenum">
+            <a:fld id="{5974C1DC-7BE4-4B0B-BF3B-6F3C8A296CFC}" type="slidenum">
               <a:rPr kumimoji="1" lang="ja-JP" altLang="en-US" smtClean="0"/>
               <a:t>‹#›</a:t>
             </a:fld>
@@ -1022,7 +1022,7 @@
     </p:spTree>
     <p:extLst>
       <p:ext uri="{BB962C8B-B14F-4D97-AF65-F5344CB8AC3E}">
-        <p14:creationId xmlns:p14="http://schemas.microsoft.com/office/powerpoint/2010/main" val="3067731298"/>
+        <p14:creationId xmlns:p14="http://schemas.microsoft.com/office/powerpoint/2010/main" val="1659875778"/>
       </p:ext>
     </p:extLst>
   </p:cSld>
@@ -1054,7 +1054,7 @@
           <p:cNvPr id="2" name="タイトル 1">
             <a:extLst>
               <a:ext uri="{FF2B5EF4-FFF2-40B4-BE49-F238E27FC236}">
-                <a16:creationId xmlns:a16="http://schemas.microsoft.com/office/drawing/2014/main" id="{8BEFAB1D-E1B4-126C-6B82-9E7E3C380BE4}"/>
+                <a16:creationId xmlns:a16="http://schemas.microsoft.com/office/drawing/2014/main" id="{348F9238-33FD-0A9B-9C39-B47857BF7640}"/>
               </a:ext>
             </a:extLst>
           </p:cNvPr>
@@ -1091,7 +1091,7 @@
           <p:cNvPr id="3" name="テキスト プレースホルダー 2">
             <a:extLst>
               <a:ext uri="{FF2B5EF4-FFF2-40B4-BE49-F238E27FC236}">
-                <a16:creationId xmlns:a16="http://schemas.microsoft.com/office/drawing/2014/main" id="{5F98515C-E932-030F-BF94-4501FAA8FF93}"/>
+                <a16:creationId xmlns:a16="http://schemas.microsoft.com/office/drawing/2014/main" id="{F02E9305-D365-A1DF-3505-4B577ABF6319}"/>
               </a:ext>
             </a:extLst>
           </p:cNvPr>
@@ -1216,7 +1216,7 @@
           <p:cNvPr id="4" name="日付プレースホルダー 3">
             <a:extLst>
               <a:ext uri="{FF2B5EF4-FFF2-40B4-BE49-F238E27FC236}">
-                <a16:creationId xmlns:a16="http://schemas.microsoft.com/office/drawing/2014/main" id="{55302C13-2CBE-78A1-581E-B7E19B3B4065}"/>
+                <a16:creationId xmlns:a16="http://schemas.microsoft.com/office/drawing/2014/main" id="{F551E861-5788-01FD-3859-FD1F1A0939E8}"/>
               </a:ext>
             </a:extLst>
           </p:cNvPr>
@@ -1232,7 +1232,7 @@
           <a:bodyPr/>
           <a:lstStyle/>
           <a:p>
-            <a:fld id="{4B28C2A7-CA13-47F5-B31F-225FA1F55699}" type="datetimeFigureOut">
+            <a:fld id="{14DDE639-C3EF-41F0-AB3C-A9D5D71B1469}" type="datetimeFigureOut">
               <a:rPr kumimoji="1" lang="ja-JP" altLang="en-US" smtClean="0"/>
               <a:t>2026/7/30</a:t>
             </a:fld>
@@ -1245,7 +1245,7 @@
           <p:cNvPr id="5" name="フッター プレースホルダー 4">
             <a:extLst>
               <a:ext uri="{FF2B5EF4-FFF2-40B4-BE49-F238E27FC236}">
-                <a16:creationId xmlns:a16="http://schemas.microsoft.com/office/drawing/2014/main" id="{1868DF7D-88A8-8983-66AB-82C7E7ECAB9F}"/>
+                <a16:creationId xmlns:a16="http://schemas.microsoft.com/office/drawing/2014/main" id="{62E2AF17-1A50-ACF7-F38E-F669CB6AB19A}"/>
               </a:ext>
             </a:extLst>
           </p:cNvPr>
@@ -1270,7 +1270,7 @@
           <p:cNvPr id="6" name="スライド番号プレースホルダー 5">
             <a:extLst>
               <a:ext uri="{FF2B5EF4-FFF2-40B4-BE49-F238E27FC236}">
-                <a16:creationId xmlns:a16="http://schemas.microsoft.com/office/drawing/2014/main" id="{3B8E4248-03D1-7D46-1AE1-06ADAC045F5D}"/>
+                <a16:creationId xmlns:a16="http://schemas.microsoft.com/office/drawing/2014/main" id="{F48EB4B2-4513-1720-3BC1-B36B71DDFE1D}"/>
               </a:ext>
             </a:extLst>
           </p:cNvPr>
@@ -1286,7 +1286,7 @@
           <a:bodyPr/>
           <a:lstStyle/>
           <a:p>
-            <a:fld id="{8C32973D-27DF-4F5A-A2A7-205083D74E96}" type="slidenum">
+            <a:fld id="{5974C1DC-7BE4-4B0B-BF3B-6F3C8A296CFC}" type="slidenum">
               <a:rPr kumimoji="1" lang="ja-JP" altLang="en-US" smtClean="0"/>
               <a:t>‹#›</a:t>
             </a:fld>
@@ -1297,7 +1297,7 @@
     </p:spTree>
     <p:extLst>
       <p:ext uri="{BB962C8B-B14F-4D97-AF65-F5344CB8AC3E}">
-        <p14:creationId xmlns:p14="http://schemas.microsoft.com/office/powerpoint/2010/main" val="2903393721"/>
+        <p14:creationId xmlns:p14="http://schemas.microsoft.com/office/powerpoint/2010/main" val="816294110"/>
       </p:ext>
     </p:extLst>
   </p:cSld>
@@ -1329,7 +1329,7 @@
           <p:cNvPr id="2" name="タイトル 1">
             <a:extLst>
               <a:ext uri="{FF2B5EF4-FFF2-40B4-BE49-F238E27FC236}">
-                <a16:creationId xmlns:a16="http://schemas.microsoft.com/office/drawing/2014/main" id="{7729474A-BCE0-D1BF-B779-96E55A414086}"/>
+                <a16:creationId xmlns:a16="http://schemas.microsoft.com/office/drawing/2014/main" id="{1837ADC8-A39D-C66E-9B18-F8D9E483EFF7}"/>
               </a:ext>
             </a:extLst>
           </p:cNvPr>
@@ -1357,7 +1357,7 @@
           <p:cNvPr id="3" name="コンテンツ プレースホルダー 2">
             <a:extLst>
               <a:ext uri="{FF2B5EF4-FFF2-40B4-BE49-F238E27FC236}">
-                <a16:creationId xmlns:a16="http://schemas.microsoft.com/office/drawing/2014/main" id="{F60039BE-3F95-C6BF-948D-D72F35B40A2C}"/>
+                <a16:creationId xmlns:a16="http://schemas.microsoft.com/office/drawing/2014/main" id="{92EBDFA8-6F91-2300-0519-504BAAD78044}"/>
               </a:ext>
             </a:extLst>
           </p:cNvPr>
@@ -1451,7 +1451,7 @@
           <p:cNvPr id="4" name="コンテンツ プレースホルダー 3">
             <a:extLst>
               <a:ext uri="{FF2B5EF4-FFF2-40B4-BE49-F238E27FC236}">
-                <a16:creationId xmlns:a16="http://schemas.microsoft.com/office/drawing/2014/main" id="{5878D7D2-A011-1387-9842-1C1EC112539D}"/>
+                <a16:creationId xmlns:a16="http://schemas.microsoft.com/office/drawing/2014/main" id="{83C70528-5F7A-9AB3-9088-E492D23BB316}"/>
               </a:ext>
             </a:extLst>
           </p:cNvPr>
@@ -1545,7 +1545,7 @@
           <p:cNvPr id="5" name="日付プレースホルダー 4">
             <a:extLst>
               <a:ext uri="{FF2B5EF4-FFF2-40B4-BE49-F238E27FC236}">
-                <a16:creationId xmlns:a16="http://schemas.microsoft.com/office/drawing/2014/main" id="{036DC744-3EEF-6722-0C98-046BF179FEC9}"/>
+                <a16:creationId xmlns:a16="http://schemas.microsoft.com/office/drawing/2014/main" id="{B9A85663-4329-FE2E-AD30-5F424DA4929F}"/>
               </a:ext>
             </a:extLst>
           </p:cNvPr>
@@ -1561,7 +1561,7 @@
           <a:bodyPr/>
           <a:lstStyle/>
           <a:p>
-            <a:fld id="{4B28C2A7-CA13-47F5-B31F-225FA1F55699}" type="datetimeFigureOut">
+            <a:fld id="{14DDE639-C3EF-41F0-AB3C-A9D5D71B1469}" type="datetimeFigureOut">
               <a:rPr kumimoji="1" lang="ja-JP" altLang="en-US" smtClean="0"/>
               <a:t>2026/7/30</a:t>
             </a:fld>
@@ -1574,7 +1574,7 @@
           <p:cNvPr id="6" name="フッター プレースホルダー 5">
             <a:extLst>
               <a:ext uri="{FF2B5EF4-FFF2-40B4-BE49-F238E27FC236}">
-                <a16:creationId xmlns:a16="http://schemas.microsoft.com/office/drawing/2014/main" id="{4B9127FD-7A49-CBF5-24DE-2D6727AD27CC}"/>
+                <a16:creationId xmlns:a16="http://schemas.microsoft.com/office/drawing/2014/main" id="{AC2F2DB8-3AB0-A3B1-5A86-2D593937EEE1}"/>
               </a:ext>
             </a:extLst>
           </p:cNvPr>
@@ -1599,7 +1599,7 @@
           <p:cNvPr id="7" name="スライド番号プレースホルダー 6">
             <a:extLst>
               <a:ext uri="{FF2B5EF4-FFF2-40B4-BE49-F238E27FC236}">
-                <a16:creationId xmlns:a16="http://schemas.microsoft.com/office/drawing/2014/main" id="{9D2FBEA5-54ED-1E87-B88E-A93ECC433C30}"/>
+                <a16:creationId xmlns:a16="http://schemas.microsoft.com/office/drawing/2014/main" id="{F34D7503-3CB2-6D28-A495-D4DFF3AFA981}"/>
               </a:ext>
             </a:extLst>
           </p:cNvPr>
@@ -1615,7 +1615,7 @@
           <a:bodyPr/>
           <a:lstStyle/>
           <a:p>
-            <a:fld id="{8C32973D-27DF-4F5A-A2A7-205083D74E96}" type="slidenum">
+            <a:fld id="{5974C1DC-7BE4-4B0B-BF3B-6F3C8A296CFC}" type="slidenum">
               <a:rPr kumimoji="1" lang="ja-JP" altLang="en-US" smtClean="0"/>
               <a:t>‹#›</a:t>
             </a:fld>
@@ -1626,7 +1626,7 @@
     </p:spTree>
     <p:extLst>
       <p:ext uri="{BB962C8B-B14F-4D97-AF65-F5344CB8AC3E}">
-        <p14:creationId xmlns:p14="http://schemas.microsoft.com/office/powerpoint/2010/main" val="3607730303"/>
+        <p14:creationId xmlns:p14="http://schemas.microsoft.com/office/powerpoint/2010/main" val="2619032097"/>
       </p:ext>
     </p:extLst>
   </p:cSld>
@@ -1658,7 +1658,7 @@
           <p:cNvPr id="2" name="タイトル 1">
             <a:extLst>
               <a:ext uri="{FF2B5EF4-FFF2-40B4-BE49-F238E27FC236}">
-                <a16:creationId xmlns:a16="http://schemas.microsoft.com/office/drawing/2014/main" id="{2EC393FF-1536-B878-93F0-CC4E3827A113}"/>
+                <a16:creationId xmlns:a16="http://schemas.microsoft.com/office/drawing/2014/main" id="{286FB25B-4F11-510F-3A5E-433D7B8FEA7D}"/>
               </a:ext>
             </a:extLst>
           </p:cNvPr>
@@ -1691,7 +1691,7 @@
           <p:cNvPr id="3" name="テキスト プレースホルダー 2">
             <a:extLst>
               <a:ext uri="{FF2B5EF4-FFF2-40B4-BE49-F238E27FC236}">
-                <a16:creationId xmlns:a16="http://schemas.microsoft.com/office/drawing/2014/main" id="{6CFD294D-EE8E-0519-EBA4-7FD3DEA24DA6}"/>
+                <a16:creationId xmlns:a16="http://schemas.microsoft.com/office/drawing/2014/main" id="{24D99311-3D69-7873-E19B-31E5711D4782}"/>
               </a:ext>
             </a:extLst>
           </p:cNvPr>
@@ -1762,7 +1762,7 @@
           <p:cNvPr id="4" name="コンテンツ プレースホルダー 3">
             <a:extLst>
               <a:ext uri="{FF2B5EF4-FFF2-40B4-BE49-F238E27FC236}">
-                <a16:creationId xmlns:a16="http://schemas.microsoft.com/office/drawing/2014/main" id="{BFDD216A-1C5F-1DBC-3106-BC7A92C92ED3}"/>
+                <a16:creationId xmlns:a16="http://schemas.microsoft.com/office/drawing/2014/main" id="{AC067701-95F1-94FF-FB48-E40D27D22579}"/>
               </a:ext>
             </a:extLst>
           </p:cNvPr>
@@ -1856,7 +1856,7 @@
           <p:cNvPr id="5" name="テキスト プレースホルダー 4">
             <a:extLst>
               <a:ext uri="{FF2B5EF4-FFF2-40B4-BE49-F238E27FC236}">
-                <a16:creationId xmlns:a16="http://schemas.microsoft.com/office/drawing/2014/main" id="{7862154B-55AE-ADE9-8D51-9DC81167A3E0}"/>
+                <a16:creationId xmlns:a16="http://schemas.microsoft.com/office/drawing/2014/main" id="{92496F5E-303C-1B12-3B31-CF0C19200328}"/>
               </a:ext>
             </a:extLst>
           </p:cNvPr>
@@ -1927,7 +1927,7 @@
           <p:cNvPr id="6" name="コンテンツ プレースホルダー 5">
             <a:extLst>
               <a:ext uri="{FF2B5EF4-FFF2-40B4-BE49-F238E27FC236}">
-                <a16:creationId xmlns:a16="http://schemas.microsoft.com/office/drawing/2014/main" id="{C0FC1458-C1AA-E431-CD24-6EDCFE98FBC6}"/>
+                <a16:creationId xmlns:a16="http://schemas.microsoft.com/office/drawing/2014/main" id="{9FF189C0-2519-3FB6-AE16-B729FBC33435}"/>
               </a:ext>
             </a:extLst>
           </p:cNvPr>
@@ -2021,7 +2021,7 @@
           <p:cNvPr id="7" name="日付プレースホルダー 6">
             <a:extLst>
               <a:ext uri="{FF2B5EF4-FFF2-40B4-BE49-F238E27FC236}">
-                <a16:creationId xmlns:a16="http://schemas.microsoft.com/office/drawing/2014/main" id="{44D984B1-B184-FA98-3327-EB5DFD1D3771}"/>
+                <a16:creationId xmlns:a16="http://schemas.microsoft.com/office/drawing/2014/main" id="{634DE1F0-0E90-605A-22FF-8E93566C5F12}"/>
               </a:ext>
             </a:extLst>
           </p:cNvPr>
@@ -2037,7 +2037,7 @@
           <a:bodyPr/>
           <a:lstStyle/>
           <a:p>
-            <a:fld id="{4B28C2A7-CA13-47F5-B31F-225FA1F55699}" type="datetimeFigureOut">
+            <a:fld id="{14DDE639-C3EF-41F0-AB3C-A9D5D71B1469}" type="datetimeFigureOut">
               <a:rPr kumimoji="1" lang="ja-JP" altLang="en-US" smtClean="0"/>
               <a:t>2026/7/30</a:t>
             </a:fld>
@@ -2050,7 +2050,7 @@
           <p:cNvPr id="8" name="フッター プレースホルダー 7">
             <a:extLst>
               <a:ext uri="{FF2B5EF4-FFF2-40B4-BE49-F238E27FC236}">
-                <a16:creationId xmlns:a16="http://schemas.microsoft.com/office/drawing/2014/main" id="{EBC95B06-77A9-88BF-C70D-BE2B86F01F3C}"/>
+                <a16:creationId xmlns:a16="http://schemas.microsoft.com/office/drawing/2014/main" id="{83D24707-E9BE-712C-DB11-294FF9F61AA0}"/>
               </a:ext>
             </a:extLst>
           </p:cNvPr>
@@ -2075,7 +2075,7 @@
           <p:cNvPr id="9" name="スライド番号プレースホルダー 8">
             <a:extLst>
               <a:ext uri="{FF2B5EF4-FFF2-40B4-BE49-F238E27FC236}">
-                <a16:creationId xmlns:a16="http://schemas.microsoft.com/office/drawing/2014/main" id="{2B17C29F-D3CA-6672-6A4D-BCDBB4CB3961}"/>
+                <a16:creationId xmlns:a16="http://schemas.microsoft.com/office/drawing/2014/main" id="{9F281ADB-33FE-B9A2-29A0-D0F77343E4BD}"/>
               </a:ext>
             </a:extLst>
           </p:cNvPr>
@@ -2091,7 +2091,7 @@
           <a:bodyPr/>
           <a:lstStyle/>
           <a:p>
-            <a:fld id="{8C32973D-27DF-4F5A-A2A7-205083D74E96}" type="slidenum">
+            <a:fld id="{5974C1DC-7BE4-4B0B-BF3B-6F3C8A296CFC}" type="slidenum">
               <a:rPr kumimoji="1" lang="ja-JP" altLang="en-US" smtClean="0"/>
               <a:t>‹#›</a:t>
             </a:fld>
@@ -2102,7 +2102,7 @@
     </p:spTree>
     <p:extLst>
       <p:ext uri="{BB962C8B-B14F-4D97-AF65-F5344CB8AC3E}">
-        <p14:creationId xmlns:p14="http://schemas.microsoft.com/office/powerpoint/2010/main" val="432527593"/>
+        <p14:creationId xmlns:p14="http://schemas.microsoft.com/office/powerpoint/2010/main" val="2634632890"/>
       </p:ext>
     </p:extLst>
   </p:cSld>
@@ -2134,7 +2134,7 @@
           <p:cNvPr id="2" name="タイトル 1">
             <a:extLst>
               <a:ext uri="{FF2B5EF4-FFF2-40B4-BE49-F238E27FC236}">
-                <a16:creationId xmlns:a16="http://schemas.microsoft.com/office/drawing/2014/main" id="{59866322-C234-E2A3-2D50-894DA9EC509D}"/>
+                <a16:creationId xmlns:a16="http://schemas.microsoft.com/office/drawing/2014/main" id="{D5EBAEE1-F50A-F22B-6C1A-FB41F9497441}"/>
               </a:ext>
             </a:extLst>
           </p:cNvPr>
@@ -2162,7 +2162,7 @@
           <p:cNvPr id="3" name="日付プレースホルダー 2">
             <a:extLst>
               <a:ext uri="{FF2B5EF4-FFF2-40B4-BE49-F238E27FC236}">
-                <a16:creationId xmlns:a16="http://schemas.microsoft.com/office/drawing/2014/main" id="{DF540908-0B25-03BE-F7A9-0DC6DB6AE629}"/>
+                <a16:creationId xmlns:a16="http://schemas.microsoft.com/office/drawing/2014/main" id="{B4946471-C277-3FD6-ACFF-A3A912C518A0}"/>
               </a:ext>
             </a:extLst>
           </p:cNvPr>
@@ -2178,7 +2178,7 @@
           <a:bodyPr/>
           <a:lstStyle/>
           <a:p>
-            <a:fld id="{4B28C2A7-CA13-47F5-B31F-225FA1F55699}" type="datetimeFigureOut">
+            <a:fld id="{14DDE639-C3EF-41F0-AB3C-A9D5D71B1469}" type="datetimeFigureOut">
               <a:rPr kumimoji="1" lang="ja-JP" altLang="en-US" smtClean="0"/>
               <a:t>2026/7/30</a:t>
             </a:fld>
@@ -2191,7 +2191,7 @@
           <p:cNvPr id="4" name="フッター プレースホルダー 3">
             <a:extLst>
               <a:ext uri="{FF2B5EF4-FFF2-40B4-BE49-F238E27FC236}">
-                <a16:creationId xmlns:a16="http://schemas.microsoft.com/office/drawing/2014/main" id="{8FA74A97-991E-AEB4-CA5C-E4AE6C673FFE}"/>
+                <a16:creationId xmlns:a16="http://schemas.microsoft.com/office/drawing/2014/main" id="{23A0113D-AB50-B78A-2EC8-BB97F0F158CB}"/>
               </a:ext>
             </a:extLst>
           </p:cNvPr>
@@ -2216,7 +2216,7 @@
           <p:cNvPr id="5" name="スライド番号プレースホルダー 4">
             <a:extLst>
               <a:ext uri="{FF2B5EF4-FFF2-40B4-BE49-F238E27FC236}">
-                <a16:creationId xmlns:a16="http://schemas.microsoft.com/office/drawing/2014/main" id="{4A6CF27A-077F-CFC9-D49B-583BC75CDCEE}"/>
+                <a16:creationId xmlns:a16="http://schemas.microsoft.com/office/drawing/2014/main" id="{0B3619A5-9691-B86D-710D-7BA814180B92}"/>
               </a:ext>
             </a:extLst>
           </p:cNvPr>
@@ -2232,7 +2232,7 @@
           <a:bodyPr/>
           <a:lstStyle/>
           <a:p>
-            <a:fld id="{8C32973D-27DF-4F5A-A2A7-205083D74E96}" type="slidenum">
+            <a:fld id="{5974C1DC-7BE4-4B0B-BF3B-6F3C8A296CFC}" type="slidenum">
               <a:rPr kumimoji="1" lang="ja-JP" altLang="en-US" smtClean="0"/>
               <a:t>‹#›</a:t>
             </a:fld>
@@ -2243,7 +2243,7 @@
     </p:spTree>
     <p:extLst>
       <p:ext uri="{BB962C8B-B14F-4D97-AF65-F5344CB8AC3E}">
-        <p14:creationId xmlns:p14="http://schemas.microsoft.com/office/powerpoint/2010/main" val="2640519055"/>
+        <p14:creationId xmlns:p14="http://schemas.microsoft.com/office/powerpoint/2010/main" val="3317585791"/>
       </p:ext>
     </p:extLst>
   </p:cSld>
@@ -2275,7 +2275,7 @@
           <p:cNvPr id="2" name="日付プレースホルダー 1">
             <a:extLst>
               <a:ext uri="{FF2B5EF4-FFF2-40B4-BE49-F238E27FC236}">
-                <a16:creationId xmlns:a16="http://schemas.microsoft.com/office/drawing/2014/main" id="{C29B6863-6DFC-C228-0D42-CF5D6C10B3D4}"/>
+                <a16:creationId xmlns:a16="http://schemas.microsoft.com/office/drawing/2014/main" id="{A1DD9D19-EE30-FC7E-9677-E56E8B9CAB80}"/>
               </a:ext>
             </a:extLst>
           </p:cNvPr>
@@ -2291,7 +2291,7 @@
           <a:bodyPr/>
           <a:lstStyle/>
           <a:p>
-            <a:fld id="{4B28C2A7-CA13-47F5-B31F-225FA1F55699}" type="datetimeFigureOut">
+            <a:fld id="{14DDE639-C3EF-41F0-AB3C-A9D5D71B1469}" type="datetimeFigureOut">
               <a:rPr kumimoji="1" lang="ja-JP" altLang="en-US" smtClean="0"/>
               <a:t>2026/7/30</a:t>
             </a:fld>
@@ -2304,7 +2304,7 @@
           <p:cNvPr id="3" name="フッター プレースホルダー 2">
             <a:extLst>
               <a:ext uri="{FF2B5EF4-FFF2-40B4-BE49-F238E27FC236}">
-                <a16:creationId xmlns:a16="http://schemas.microsoft.com/office/drawing/2014/main" id="{34E87CBF-9EF4-CDEA-00C5-E3A2287AA5DB}"/>
+                <a16:creationId xmlns:a16="http://schemas.microsoft.com/office/drawing/2014/main" id="{79DD2F06-253A-5E97-DA13-37ED4BF48BF0}"/>
               </a:ext>
             </a:extLst>
           </p:cNvPr>
@@ -2329,7 +2329,7 @@
           <p:cNvPr id="4" name="スライド番号プレースホルダー 3">
             <a:extLst>
               <a:ext uri="{FF2B5EF4-FFF2-40B4-BE49-F238E27FC236}">
-                <a16:creationId xmlns:a16="http://schemas.microsoft.com/office/drawing/2014/main" id="{03A17E06-0E9B-EA1B-1BFA-55F17E3EB376}"/>
+                <a16:creationId xmlns:a16="http://schemas.microsoft.com/office/drawing/2014/main" id="{74A1DB46-AEC9-E1F2-EFF5-17C05F12337D}"/>
               </a:ext>
             </a:extLst>
           </p:cNvPr>
@@ -2345,7 +2345,7 @@
           <a:bodyPr/>
           <a:lstStyle/>
           <a:p>
-            <a:fld id="{8C32973D-27DF-4F5A-A2A7-205083D74E96}" type="slidenum">
+            <a:fld id="{5974C1DC-7BE4-4B0B-BF3B-6F3C8A296CFC}" type="slidenum">
               <a:rPr kumimoji="1" lang="ja-JP" altLang="en-US" smtClean="0"/>
               <a:t>‹#›</a:t>
             </a:fld>
@@ -2356,7 +2356,7 @@
     </p:spTree>
     <p:extLst>
       <p:ext uri="{BB962C8B-B14F-4D97-AF65-F5344CB8AC3E}">
-        <p14:creationId xmlns:p14="http://schemas.microsoft.com/office/powerpoint/2010/main" val="1184441845"/>
+        <p14:creationId xmlns:p14="http://schemas.microsoft.com/office/powerpoint/2010/main" val="1943877481"/>
       </p:ext>
     </p:extLst>
   </p:cSld>
@@ -2388,7 +2388,7 @@
           <p:cNvPr id="2" name="タイトル 1">
             <a:extLst>
               <a:ext uri="{FF2B5EF4-FFF2-40B4-BE49-F238E27FC236}">
-                <a16:creationId xmlns:a16="http://schemas.microsoft.com/office/drawing/2014/main" id="{A0559A9A-EDD9-9209-8EC8-A2C0BBC476B6}"/>
+                <a16:creationId xmlns:a16="http://schemas.microsoft.com/office/drawing/2014/main" id="{A6DDC84F-9924-432B-06C9-BADA8B0ACD42}"/>
               </a:ext>
             </a:extLst>
           </p:cNvPr>
@@ -2425,7 +2425,7 @@
           <p:cNvPr id="3" name="コンテンツ プレースホルダー 2">
             <a:extLst>
               <a:ext uri="{FF2B5EF4-FFF2-40B4-BE49-F238E27FC236}">
-                <a16:creationId xmlns:a16="http://schemas.microsoft.com/office/drawing/2014/main" id="{B3EF0B71-86F0-0D2E-7844-7805201CE0B3}"/>
+                <a16:creationId xmlns:a16="http://schemas.microsoft.com/office/drawing/2014/main" id="{6C8F4105-5669-9DF8-59C1-68E9FD37ED2B}"/>
               </a:ext>
             </a:extLst>
           </p:cNvPr>
@@ -2547,7 +2547,7 @@
           <p:cNvPr id="4" name="テキスト プレースホルダー 3">
             <a:extLst>
               <a:ext uri="{FF2B5EF4-FFF2-40B4-BE49-F238E27FC236}">
-                <a16:creationId xmlns:a16="http://schemas.microsoft.com/office/drawing/2014/main" id="{9E0B5DDE-BA3D-A35D-ABED-C89A762FB9BB}"/>
+                <a16:creationId xmlns:a16="http://schemas.microsoft.com/office/drawing/2014/main" id="{427E13E3-F9B4-D456-BC44-49B78311B8B0}"/>
               </a:ext>
             </a:extLst>
           </p:cNvPr>
@@ -2618,7 +2618,7 @@
           <p:cNvPr id="5" name="日付プレースホルダー 4">
             <a:extLst>
               <a:ext uri="{FF2B5EF4-FFF2-40B4-BE49-F238E27FC236}">
-                <a16:creationId xmlns:a16="http://schemas.microsoft.com/office/drawing/2014/main" id="{58812DAA-928F-0C46-FF08-2FAEC9194FD5}"/>
+                <a16:creationId xmlns:a16="http://schemas.microsoft.com/office/drawing/2014/main" id="{1E23F305-FD4C-5DE4-9872-B8D5460CB185}"/>
               </a:ext>
             </a:extLst>
           </p:cNvPr>
@@ -2634,7 +2634,7 @@
           <a:bodyPr/>
           <a:lstStyle/>
           <a:p>
-            <a:fld id="{4B28C2A7-CA13-47F5-B31F-225FA1F55699}" type="datetimeFigureOut">
+            <a:fld id="{14DDE639-C3EF-41F0-AB3C-A9D5D71B1469}" type="datetimeFigureOut">
               <a:rPr kumimoji="1" lang="ja-JP" altLang="en-US" smtClean="0"/>
               <a:t>2026/7/30</a:t>
             </a:fld>
@@ -2647,7 +2647,7 @@
           <p:cNvPr id="6" name="フッター プレースホルダー 5">
             <a:extLst>
               <a:ext uri="{FF2B5EF4-FFF2-40B4-BE49-F238E27FC236}">
-                <a16:creationId xmlns:a16="http://schemas.microsoft.com/office/drawing/2014/main" id="{36C11993-9131-A4A7-3369-F3CBDA28222A}"/>
+                <a16:creationId xmlns:a16="http://schemas.microsoft.com/office/drawing/2014/main" id="{8195DA95-A058-C92D-DDC1-6840FDE52DE5}"/>
               </a:ext>
             </a:extLst>
           </p:cNvPr>
@@ -2672,7 +2672,7 @@
           <p:cNvPr id="7" name="スライド番号プレースホルダー 6">
             <a:extLst>
               <a:ext uri="{FF2B5EF4-FFF2-40B4-BE49-F238E27FC236}">
-                <a16:creationId xmlns:a16="http://schemas.microsoft.com/office/drawing/2014/main" id="{53DABE16-A4B9-9FF4-D78E-E3F7B8CFBF69}"/>
+                <a16:creationId xmlns:a16="http://schemas.microsoft.com/office/drawing/2014/main" id="{AB2BCB22-F3E0-F65C-8F85-A4402367190D}"/>
               </a:ext>
             </a:extLst>
           </p:cNvPr>
@@ -2688,7 +2688,7 @@
           <a:bodyPr/>
           <a:lstStyle/>
           <a:p>
-            <a:fld id="{8C32973D-27DF-4F5A-A2A7-205083D74E96}" type="slidenum">
+            <a:fld id="{5974C1DC-7BE4-4B0B-BF3B-6F3C8A296CFC}" type="slidenum">
               <a:rPr kumimoji="1" lang="ja-JP" altLang="en-US" smtClean="0"/>
               <a:t>‹#›</a:t>
             </a:fld>
@@ -2699,7 +2699,7 @@
     </p:spTree>
     <p:extLst>
       <p:ext uri="{BB962C8B-B14F-4D97-AF65-F5344CB8AC3E}">
-        <p14:creationId xmlns:p14="http://schemas.microsoft.com/office/powerpoint/2010/main" val="3900321655"/>
+        <p14:creationId xmlns:p14="http://schemas.microsoft.com/office/powerpoint/2010/main" val="2249080402"/>
       </p:ext>
     </p:extLst>
   </p:cSld>
@@ -2731,7 +2731,7 @@
           <p:cNvPr id="2" name="タイトル 1">
             <a:extLst>
               <a:ext uri="{FF2B5EF4-FFF2-40B4-BE49-F238E27FC236}">
-                <a16:creationId xmlns:a16="http://schemas.microsoft.com/office/drawing/2014/main" id="{287D7040-4098-2460-3C08-241756D09175}"/>
+                <a16:creationId xmlns:a16="http://schemas.microsoft.com/office/drawing/2014/main" id="{BA552280-D66C-0B2A-CFAA-B67387BE5B5F}"/>
               </a:ext>
             </a:extLst>
           </p:cNvPr>
@@ -2768,7 +2768,7 @@
           <p:cNvPr id="3" name="図プレースホルダー 2">
             <a:extLst>
               <a:ext uri="{FF2B5EF4-FFF2-40B4-BE49-F238E27FC236}">
-                <a16:creationId xmlns:a16="http://schemas.microsoft.com/office/drawing/2014/main" id="{FFFB9199-C7FB-10FC-3786-0C7720BEA0A7}"/>
+                <a16:creationId xmlns:a16="http://schemas.microsoft.com/office/drawing/2014/main" id="{D0194734-87F9-30D5-1E16-3F607860EB4A}"/>
               </a:ext>
             </a:extLst>
           </p:cNvPr>
@@ -2835,7 +2835,7 @@
           <p:cNvPr id="4" name="テキスト プレースホルダー 3">
             <a:extLst>
               <a:ext uri="{FF2B5EF4-FFF2-40B4-BE49-F238E27FC236}">
-                <a16:creationId xmlns:a16="http://schemas.microsoft.com/office/drawing/2014/main" id="{E396157C-27DC-21A8-0B43-F896580470A0}"/>
+                <a16:creationId xmlns:a16="http://schemas.microsoft.com/office/drawing/2014/main" id="{DC821C73-694B-8E2A-4A3F-254EE054A5A1}"/>
               </a:ext>
             </a:extLst>
           </p:cNvPr>
@@ -2906,7 +2906,7 @@
           <p:cNvPr id="5" name="日付プレースホルダー 4">
             <a:extLst>
               <a:ext uri="{FF2B5EF4-FFF2-40B4-BE49-F238E27FC236}">
-                <a16:creationId xmlns:a16="http://schemas.microsoft.com/office/drawing/2014/main" id="{96D2BD41-C737-1FFC-D545-86F2C4DDD343}"/>
+                <a16:creationId xmlns:a16="http://schemas.microsoft.com/office/drawing/2014/main" id="{47C0C976-F259-14AE-57ED-A32108990284}"/>
               </a:ext>
             </a:extLst>
           </p:cNvPr>
@@ -2922,7 +2922,7 @@
           <a:bodyPr/>
           <a:lstStyle/>
           <a:p>
-            <a:fld id="{4B28C2A7-CA13-47F5-B31F-225FA1F55699}" type="datetimeFigureOut">
+            <a:fld id="{14DDE639-C3EF-41F0-AB3C-A9D5D71B1469}" type="datetimeFigureOut">
               <a:rPr kumimoji="1" lang="ja-JP" altLang="en-US" smtClean="0"/>
               <a:t>2026/7/30</a:t>
             </a:fld>
@@ -2935,7 +2935,7 @@
           <p:cNvPr id="6" name="フッター プレースホルダー 5">
             <a:extLst>
               <a:ext uri="{FF2B5EF4-FFF2-40B4-BE49-F238E27FC236}">
-                <a16:creationId xmlns:a16="http://schemas.microsoft.com/office/drawing/2014/main" id="{ECCF7EC1-F1D9-AC86-99B0-76963FC34CB2}"/>
+                <a16:creationId xmlns:a16="http://schemas.microsoft.com/office/drawing/2014/main" id="{49D48FFF-35F8-E8EF-C8C5-EA77BBE7084C}"/>
               </a:ext>
             </a:extLst>
           </p:cNvPr>
@@ -2960,7 +2960,7 @@
           <p:cNvPr id="7" name="スライド番号プレースホルダー 6">
             <a:extLst>
               <a:ext uri="{FF2B5EF4-FFF2-40B4-BE49-F238E27FC236}">
-                <a16:creationId xmlns:a16="http://schemas.microsoft.com/office/drawing/2014/main" id="{D12993B9-A220-42F5-EF39-E79F70919F12}"/>
+                <a16:creationId xmlns:a16="http://schemas.microsoft.com/office/drawing/2014/main" id="{FBF5AC02-2CF1-BF16-0E13-B59DFB17A8D9}"/>
               </a:ext>
             </a:extLst>
           </p:cNvPr>
@@ -2976,7 +2976,7 @@
           <a:bodyPr/>
           <a:lstStyle/>
           <a:p>
-            <a:fld id="{8C32973D-27DF-4F5A-A2A7-205083D74E96}" type="slidenum">
+            <a:fld id="{5974C1DC-7BE4-4B0B-BF3B-6F3C8A296CFC}" type="slidenum">
               <a:rPr kumimoji="1" lang="ja-JP" altLang="en-US" smtClean="0"/>
               <a:t>‹#›</a:t>
             </a:fld>
@@ -2987,7 +2987,7 @@
     </p:spTree>
     <p:extLst>
       <p:ext uri="{BB962C8B-B14F-4D97-AF65-F5344CB8AC3E}">
-        <p14:creationId xmlns:p14="http://schemas.microsoft.com/office/powerpoint/2010/main" val="1891651506"/>
+        <p14:creationId xmlns:p14="http://schemas.microsoft.com/office/powerpoint/2010/main" val="458729170"/>
       </p:ext>
     </p:extLst>
   </p:cSld>
@@ -3024,7 +3024,7 @@
           <p:cNvPr id="2" name="タイトル プレースホルダー 1">
             <a:extLst>
               <a:ext uri="{FF2B5EF4-FFF2-40B4-BE49-F238E27FC236}">
-                <a16:creationId xmlns:a16="http://schemas.microsoft.com/office/drawing/2014/main" id="{6A27A92D-B46F-D4C4-3B76-A198F2DD450D}"/>
+                <a16:creationId xmlns:a16="http://schemas.microsoft.com/office/drawing/2014/main" id="{37DB6B30-08E7-2BAB-AC6B-FC293C86517C}"/>
               </a:ext>
             </a:extLst>
           </p:cNvPr>
@@ -3062,7 +3062,7 @@
           <p:cNvPr id="3" name="テキスト プレースホルダー 2">
             <a:extLst>
               <a:ext uri="{FF2B5EF4-FFF2-40B4-BE49-F238E27FC236}">
-                <a16:creationId xmlns:a16="http://schemas.microsoft.com/office/drawing/2014/main" id="{03235017-247A-5D25-CC97-A21317C0B768}"/>
+                <a16:creationId xmlns:a16="http://schemas.microsoft.com/office/drawing/2014/main" id="{AB298261-EB9B-76E5-5B56-6EF54E6B0716}"/>
               </a:ext>
             </a:extLst>
           </p:cNvPr>
@@ -3161,7 +3161,7 @@
           <p:cNvPr id="4" name="日付プレースホルダー 3">
             <a:extLst>
               <a:ext uri="{FF2B5EF4-FFF2-40B4-BE49-F238E27FC236}">
-                <a16:creationId xmlns:a16="http://schemas.microsoft.com/office/drawing/2014/main" id="{C222B494-4485-53DB-911A-8E5B2A14DBE2}"/>
+                <a16:creationId xmlns:a16="http://schemas.microsoft.com/office/drawing/2014/main" id="{92701CA9-D8FC-88B4-4F64-464F40FCF4A5}"/>
               </a:ext>
             </a:extLst>
           </p:cNvPr>
@@ -3195,7 +3195,7 @@
             </a:lvl1pPr>
           </a:lstStyle>
           <a:p>
-            <a:fld id="{4B28C2A7-CA13-47F5-B31F-225FA1F55699}" type="datetimeFigureOut">
+            <a:fld id="{14DDE639-C3EF-41F0-AB3C-A9D5D71B1469}" type="datetimeFigureOut">
               <a:rPr kumimoji="1" lang="ja-JP" altLang="en-US" smtClean="0"/>
               <a:t>2026/7/30</a:t>
             </a:fld>
@@ -3208,7 +3208,7 @@
           <p:cNvPr id="5" name="フッター プレースホルダー 4">
             <a:extLst>
               <a:ext uri="{FF2B5EF4-FFF2-40B4-BE49-F238E27FC236}">
-                <a16:creationId xmlns:a16="http://schemas.microsoft.com/office/drawing/2014/main" id="{66E721E8-2858-15D7-0640-AB3B5C052F9D}"/>
+                <a16:creationId xmlns:a16="http://schemas.microsoft.com/office/drawing/2014/main" id="{C6AC1B9E-0C52-9A6F-A236-3D6F5BD9DCB3}"/>
               </a:ext>
             </a:extLst>
           </p:cNvPr>
@@ -3251,7 +3251,7 @@
           <p:cNvPr id="6" name="スライド番号プレースホルダー 5">
             <a:extLst>
               <a:ext uri="{FF2B5EF4-FFF2-40B4-BE49-F238E27FC236}">
-                <a16:creationId xmlns:a16="http://schemas.microsoft.com/office/drawing/2014/main" id="{BA5BA3C1-0EB0-7C5C-E0FA-76E038724C4F}"/>
+                <a16:creationId xmlns:a16="http://schemas.microsoft.com/office/drawing/2014/main" id="{59BFF1D9-095D-541D-3EAD-10792D020BE7}"/>
               </a:ext>
             </a:extLst>
           </p:cNvPr>
@@ -3285,7 +3285,7 @@
             </a:lvl1pPr>
           </a:lstStyle>
           <a:p>
-            <a:fld id="{8C32973D-27DF-4F5A-A2A7-205083D74E96}" type="slidenum">
+            <a:fld id="{5974C1DC-7BE4-4B0B-BF3B-6F3C8A296CFC}" type="slidenum">
               <a:rPr kumimoji="1" lang="ja-JP" altLang="en-US" smtClean="0"/>
               <a:t>‹#›</a:t>
             </a:fld>
@@ -3296,7 +3296,7 @@
     </p:spTree>
     <p:extLst>
       <p:ext uri="{BB962C8B-B14F-4D97-AF65-F5344CB8AC3E}">
-        <p14:creationId xmlns:p14="http://schemas.microsoft.com/office/powerpoint/2010/main" val="4084020177"/>
+        <p14:creationId xmlns:p14="http://schemas.microsoft.com/office/powerpoint/2010/main" val="1591877695"/>
       </p:ext>
     </p:extLst>
   </p:cSld>
@@ -3619,7 +3619,7 @@
           <p:cNvPr id="2" name="テキスト ボックス 1">
             <a:extLst>
               <a:ext uri="{FF2B5EF4-FFF2-40B4-BE49-F238E27FC236}">
-                <a16:creationId xmlns:a16="http://schemas.microsoft.com/office/drawing/2014/main" id="{C14DA2C3-0551-259F-480D-29F7E25A062F}"/>
+                <a16:creationId xmlns:a16="http://schemas.microsoft.com/office/drawing/2014/main" id="{BC2DE649-4143-F84E-615E-8E1B002CE14C}"/>
               </a:ext>
             </a:extLst>
           </p:cNvPr>
@@ -3665,7 +3665,7 @@
           <p:cNvPr id="3" name="テキスト ボックス 2">
             <a:extLst>
               <a:ext uri="{FF2B5EF4-FFF2-40B4-BE49-F238E27FC236}">
-                <a16:creationId xmlns:a16="http://schemas.microsoft.com/office/drawing/2014/main" id="{A092093E-FA67-BDE7-444E-EF1C14A53F1D}"/>
+                <a16:creationId xmlns:a16="http://schemas.microsoft.com/office/drawing/2014/main" id="{D3B6C353-F707-6F84-2116-626628A047D0}"/>
               </a:ext>
             </a:extLst>
           </p:cNvPr>
@@ -3714,7 +3714,7 @@
           <p:cNvPr id="4" name="テキスト ボックス 3">
             <a:extLst>
               <a:ext uri="{FF2B5EF4-FFF2-40B4-BE49-F238E27FC236}">
-                <a16:creationId xmlns:a16="http://schemas.microsoft.com/office/drawing/2014/main" id="{96E1ABB6-73B9-0C5A-40BD-B1493BC08FEB}"/>
+                <a16:creationId xmlns:a16="http://schemas.microsoft.com/office/drawing/2014/main" id="{672296A9-9937-833F-A93D-E8B6FF983FB0}"/>
               </a:ext>
             </a:extLst>
           </p:cNvPr>
@@ -3754,7 +3754,7 @@
           <p:cNvPr id="5" name="テキスト ボックス 4">
             <a:extLst>
               <a:ext uri="{FF2B5EF4-FFF2-40B4-BE49-F238E27FC236}">
-                <a16:creationId xmlns:a16="http://schemas.microsoft.com/office/drawing/2014/main" id="{22639573-3E2D-4031-1CF4-2EA96107E4C8}"/>
+                <a16:creationId xmlns:a16="http://schemas.microsoft.com/office/drawing/2014/main" id="{D319E3C0-5433-D6A7-A552-E53AD5495496}"/>
               </a:ext>
             </a:extLst>
           </p:cNvPr>
@@ -3801,7 +3801,7 @@
             <a:hlinkClick r:id="" action="ppaction://media"/>
             <a:extLst>
               <a:ext uri="{FF2B5EF4-FFF2-40B4-BE49-F238E27FC236}">
-                <a16:creationId xmlns:a16="http://schemas.microsoft.com/office/drawing/2014/main" id="{F5012090-874D-C0B9-825A-6B8071710F0D}"/>
+                <a16:creationId xmlns:a16="http://schemas.microsoft.com/office/drawing/2014/main" id="{3612C5A7-74C2-0D08-BF0D-A4E765669206}"/>
               </a:ext>
             </a:extLst>
           </p:cNvPr>
@@ -3836,7 +3836,7 @@
     </p:spTree>
     <p:extLst>
       <p:ext uri="{BB962C8B-B14F-4D97-AF65-F5344CB8AC3E}">
-        <p14:creationId xmlns:p14="http://schemas.microsoft.com/office/powerpoint/2010/main" val="3138791263"/>
+        <p14:creationId xmlns:p14="http://schemas.microsoft.com/office/powerpoint/2010/main" val="1760051220"/>
       </p:ext>
     </p:extLst>
   </p:cSld>
@@ -3960,7 +3960,7 @@
           <p:cNvPr id="2" name="テキスト ボックス 1">
             <a:extLst>
               <a:ext uri="{FF2B5EF4-FFF2-40B4-BE49-F238E27FC236}">
-                <a16:creationId xmlns:a16="http://schemas.microsoft.com/office/drawing/2014/main" id="{4C723D1F-B223-1283-CD5B-E63EE74CB8E2}"/>
+                <a16:creationId xmlns:a16="http://schemas.microsoft.com/office/drawing/2014/main" id="{093A3011-7640-72AC-5435-9E88EC37643C}"/>
               </a:ext>
             </a:extLst>
           </p:cNvPr>
@@ -4006,7 +4006,7 @@
           <p:cNvPr id="3" name="テキスト ボックス 2">
             <a:extLst>
               <a:ext uri="{FF2B5EF4-FFF2-40B4-BE49-F238E27FC236}">
-                <a16:creationId xmlns:a16="http://schemas.microsoft.com/office/drawing/2014/main" id="{12BA0869-390D-F2CF-696B-20F9C61B0C93}"/>
+                <a16:creationId xmlns:a16="http://schemas.microsoft.com/office/drawing/2014/main" id="{D5135B93-9D03-4349-5907-A804BA7A6D50}"/>
               </a:ext>
             </a:extLst>
           </p:cNvPr>
@@ -4046,7 +4046,7 @@
           <p:cNvPr id="4" name="テキスト ボックス 3">
             <a:extLst>
               <a:ext uri="{FF2B5EF4-FFF2-40B4-BE49-F238E27FC236}">
-                <a16:creationId xmlns:a16="http://schemas.microsoft.com/office/drawing/2014/main" id="{201858D7-6813-9FB7-0422-4C97BE9BA1AF}"/>
+                <a16:creationId xmlns:a16="http://schemas.microsoft.com/office/drawing/2014/main" id="{8DDA06D5-AD80-4562-3BDC-C2CFBC1F88AE}"/>
               </a:ext>
             </a:extLst>
           </p:cNvPr>
@@ -4113,7 +4113,7 @@
           <p:cNvPr id="5" name="テキスト ボックス 4">
             <a:extLst>
               <a:ext uri="{FF2B5EF4-FFF2-40B4-BE49-F238E27FC236}">
-                <a16:creationId xmlns:a16="http://schemas.microsoft.com/office/drawing/2014/main" id="{25484205-550E-EB8C-E1BB-7DBB70249883}"/>
+                <a16:creationId xmlns:a16="http://schemas.microsoft.com/office/drawing/2014/main" id="{02AE02FC-4E9C-F339-1BA9-AD0C152DE581}"/>
               </a:ext>
             </a:extLst>
           </p:cNvPr>
@@ -4160,7 +4160,7 @@
             <a:hlinkClick r:id="" action="ppaction://media"/>
             <a:extLst>
               <a:ext uri="{FF2B5EF4-FFF2-40B4-BE49-F238E27FC236}">
-                <a16:creationId xmlns:a16="http://schemas.microsoft.com/office/drawing/2014/main" id="{4AA935D6-9BBC-1B3E-F904-BAB4A3E4F26F}"/>
+                <a16:creationId xmlns:a16="http://schemas.microsoft.com/office/drawing/2014/main" id="{3563837B-7E5A-4CCC-9D3C-A434922D059A}"/>
               </a:ext>
             </a:extLst>
           </p:cNvPr>
@@ -4195,7 +4195,7 @@
     </p:spTree>
     <p:extLst>
       <p:ext uri="{BB962C8B-B14F-4D97-AF65-F5344CB8AC3E}">
-        <p14:creationId xmlns:p14="http://schemas.microsoft.com/office/powerpoint/2010/main" val="4109644675"/>
+        <p14:creationId xmlns:p14="http://schemas.microsoft.com/office/powerpoint/2010/main" val="2809426211"/>
       </p:ext>
     </p:extLst>
   </p:cSld>
@@ -4319,7 +4319,7 @@
           <p:cNvPr id="2" name="テキスト ボックス 1">
             <a:extLst>
               <a:ext uri="{FF2B5EF4-FFF2-40B4-BE49-F238E27FC236}">
-                <a16:creationId xmlns:a16="http://schemas.microsoft.com/office/drawing/2014/main" id="{48BF567D-AAE2-4F6D-13D1-D35D427B7559}"/>
+                <a16:creationId xmlns:a16="http://schemas.microsoft.com/office/drawing/2014/main" id="{790F17C9-9F40-998F-02F1-D645879E2F09}"/>
               </a:ext>
             </a:extLst>
           </p:cNvPr>
@@ -4365,7 +4365,7 @@
           <p:cNvPr id="3" name="テキスト ボックス 2">
             <a:extLst>
               <a:ext uri="{FF2B5EF4-FFF2-40B4-BE49-F238E27FC236}">
-                <a16:creationId xmlns:a16="http://schemas.microsoft.com/office/drawing/2014/main" id="{15546B95-1640-BD19-E799-5A2526BA9786}"/>
+                <a16:creationId xmlns:a16="http://schemas.microsoft.com/office/drawing/2014/main" id="{E9346A3F-9EE1-0E0A-121E-9BB051019820}"/>
               </a:ext>
             </a:extLst>
           </p:cNvPr>
@@ -4405,7 +4405,7 @@
           <p:cNvPr id="4" name="テキスト ボックス 3">
             <a:extLst>
               <a:ext uri="{FF2B5EF4-FFF2-40B4-BE49-F238E27FC236}">
-                <a16:creationId xmlns:a16="http://schemas.microsoft.com/office/drawing/2014/main" id="{DC5A9FC6-3988-A14D-84E9-84D3D2363FFD}"/>
+                <a16:creationId xmlns:a16="http://schemas.microsoft.com/office/drawing/2014/main" id="{08689E87-DA74-BB15-24C0-AB6CA66F869B}"/>
               </a:ext>
             </a:extLst>
           </p:cNvPr>
@@ -4482,7 +4482,7 @@
           <p:cNvPr id="5" name="テキスト ボックス 4">
             <a:extLst>
               <a:ext uri="{FF2B5EF4-FFF2-40B4-BE49-F238E27FC236}">
-                <a16:creationId xmlns:a16="http://schemas.microsoft.com/office/drawing/2014/main" id="{0FD0834F-86C1-10F2-4658-7BAF90ED7D89}"/>
+                <a16:creationId xmlns:a16="http://schemas.microsoft.com/office/drawing/2014/main" id="{126C59D5-1645-8A8B-2081-60DEC946A9D1}"/>
               </a:ext>
             </a:extLst>
           </p:cNvPr>
@@ -4529,7 +4529,7 @@
             <a:hlinkClick r:id="" action="ppaction://media"/>
             <a:extLst>
               <a:ext uri="{FF2B5EF4-FFF2-40B4-BE49-F238E27FC236}">
-                <a16:creationId xmlns:a16="http://schemas.microsoft.com/office/drawing/2014/main" id="{F47E28D7-29D5-2DB0-27A7-9C733CFD4083}"/>
+                <a16:creationId xmlns:a16="http://schemas.microsoft.com/office/drawing/2014/main" id="{6C40843F-6E45-1168-84C7-E0EF814B0715}"/>
               </a:ext>
             </a:extLst>
           </p:cNvPr>
@@ -4564,7 +4564,7 @@
     </p:spTree>
     <p:extLst>
       <p:ext uri="{BB962C8B-B14F-4D97-AF65-F5344CB8AC3E}">
-        <p14:creationId xmlns:p14="http://schemas.microsoft.com/office/powerpoint/2010/main" val="3527958945"/>
+        <p14:creationId xmlns:p14="http://schemas.microsoft.com/office/powerpoint/2010/main" val="660294565"/>
       </p:ext>
     </p:extLst>
   </p:cSld>
@@ -4688,7 +4688,7 @@
           <p:cNvPr id="2" name="テキスト ボックス 1">
             <a:extLst>
               <a:ext uri="{FF2B5EF4-FFF2-40B4-BE49-F238E27FC236}">
-                <a16:creationId xmlns:a16="http://schemas.microsoft.com/office/drawing/2014/main" id="{7508188D-1DD4-A93A-B17A-BAAA697396F6}"/>
+                <a16:creationId xmlns:a16="http://schemas.microsoft.com/office/drawing/2014/main" id="{EF0789BE-9BD3-1A28-BBDE-F32B4D2414CD}"/>
               </a:ext>
             </a:extLst>
           </p:cNvPr>
@@ -4734,7 +4734,7 @@
           <p:cNvPr id="3" name="テキスト ボックス 2">
             <a:extLst>
               <a:ext uri="{FF2B5EF4-FFF2-40B4-BE49-F238E27FC236}">
-                <a16:creationId xmlns:a16="http://schemas.microsoft.com/office/drawing/2014/main" id="{7A1FD800-58BE-77C8-7C39-F8D449BB2B97}"/>
+                <a16:creationId xmlns:a16="http://schemas.microsoft.com/office/drawing/2014/main" id="{7AA4B873-D418-7A4B-1084-A01FB420732B}"/>
               </a:ext>
             </a:extLst>
           </p:cNvPr>
@@ -4774,7 +4774,7 @@
           <p:cNvPr id="4" name="テキスト ボックス 3">
             <a:extLst>
               <a:ext uri="{FF2B5EF4-FFF2-40B4-BE49-F238E27FC236}">
-                <a16:creationId xmlns:a16="http://schemas.microsoft.com/office/drawing/2014/main" id="{EB431EBA-BA32-16E5-A275-349933514F0A}"/>
+                <a16:creationId xmlns:a16="http://schemas.microsoft.com/office/drawing/2014/main" id="{A4D52B91-946D-BED9-0CBB-5341FA6F7B25}"/>
               </a:ext>
             </a:extLst>
           </p:cNvPr>
@@ -4884,7 +4884,7 @@
           <p:cNvPr id="5" name="テキスト ボックス 4">
             <a:extLst>
               <a:ext uri="{FF2B5EF4-FFF2-40B4-BE49-F238E27FC236}">
-                <a16:creationId xmlns:a16="http://schemas.microsoft.com/office/drawing/2014/main" id="{70B2BF10-AE4D-FA7D-CE08-3043D02A901E}"/>
+                <a16:creationId xmlns:a16="http://schemas.microsoft.com/office/drawing/2014/main" id="{9ACD4082-4DF3-B719-BD61-82758BE95D29}"/>
               </a:ext>
             </a:extLst>
           </p:cNvPr>
@@ -4931,7 +4931,7 @@
             <a:hlinkClick r:id="" action="ppaction://media"/>
             <a:extLst>
               <a:ext uri="{FF2B5EF4-FFF2-40B4-BE49-F238E27FC236}">
-                <a16:creationId xmlns:a16="http://schemas.microsoft.com/office/drawing/2014/main" id="{1BE602F6-5061-3184-939F-07D59E597CB6}"/>
+                <a16:creationId xmlns:a16="http://schemas.microsoft.com/office/drawing/2014/main" id="{86EFA413-7D07-CC40-B500-AA645F33CC67}"/>
               </a:ext>
             </a:extLst>
           </p:cNvPr>
@@ -4966,7 +4966,7 @@
     </p:spTree>
     <p:extLst>
       <p:ext uri="{BB962C8B-B14F-4D97-AF65-F5344CB8AC3E}">
-        <p14:creationId xmlns:p14="http://schemas.microsoft.com/office/powerpoint/2010/main" val="973731837"/>
+        <p14:creationId xmlns:p14="http://schemas.microsoft.com/office/powerpoint/2010/main" val="2730889744"/>
       </p:ext>
     </p:extLst>
   </p:cSld>
@@ -5090,7 +5090,7 @@
           <p:cNvPr id="2" name="テキスト ボックス 1">
             <a:extLst>
               <a:ext uri="{FF2B5EF4-FFF2-40B4-BE49-F238E27FC236}">
-                <a16:creationId xmlns:a16="http://schemas.microsoft.com/office/drawing/2014/main" id="{1A439FCD-0B00-6507-E7F0-074F6CC3DF72}"/>
+                <a16:creationId xmlns:a16="http://schemas.microsoft.com/office/drawing/2014/main" id="{1D21D773-72C7-BB1E-0A46-6E1B386434B6}"/>
               </a:ext>
             </a:extLst>
           </p:cNvPr>
@@ -5136,7 +5136,7 @@
           <p:cNvPr id="3" name="テキスト ボックス 2">
             <a:extLst>
               <a:ext uri="{FF2B5EF4-FFF2-40B4-BE49-F238E27FC236}">
-                <a16:creationId xmlns:a16="http://schemas.microsoft.com/office/drawing/2014/main" id="{4921F7E0-FABF-C00C-1BC0-F7621EEC53CE}"/>
+                <a16:creationId xmlns:a16="http://schemas.microsoft.com/office/drawing/2014/main" id="{0AA2CC5A-0DA2-4583-07D4-06A022482A82}"/>
               </a:ext>
             </a:extLst>
           </p:cNvPr>
@@ -5176,7 +5176,7 @@
           <p:cNvPr id="4" name="テキスト ボックス 3">
             <a:extLst>
               <a:ext uri="{FF2B5EF4-FFF2-40B4-BE49-F238E27FC236}">
-                <a16:creationId xmlns:a16="http://schemas.microsoft.com/office/drawing/2014/main" id="{A5AF9B57-1EFA-4158-5B9D-5F359A95A93A}"/>
+                <a16:creationId xmlns:a16="http://schemas.microsoft.com/office/drawing/2014/main" id="{54F4B2E1-B0B6-E4E1-BFEE-AD5766DC0792}"/>
               </a:ext>
             </a:extLst>
           </p:cNvPr>
@@ -5200,20 +5200,14 @@
           <a:lstStyle/>
           <a:p>
             <a:r>
-              <a:rPr kumimoji="1" lang="en-US" altLang="ja-JP" sz="2000">
+              <a:rPr kumimoji="1" lang="ja-JP" altLang="en-US" sz="2000">
                 <a:solidFill>
                   <a:srgbClr val="333333"/>
                 </a:solidFill>
                 <a:latin typeface="Arial" panose="020B0604020202020204" pitchFamily="34" charset="0"/>
               </a:rPr>
-              <a:t>Configure Sites hosting</a:t>
-            </a:r>
-            <a:endParaRPr kumimoji="1" lang="ja-JP" altLang="en-US" sz="2000">
-              <a:solidFill>
-                <a:srgbClr val="333333"/>
-              </a:solidFill>
-              <a:latin typeface="Arial" panose="020B0604020202020204" pitchFamily="34" charset="0"/>
-            </a:endParaRPr>
+              <a:t>直近のコミットでは、実装の見直しと継続的な改善が行われました。</a:t>
+            </a:r>
           </a:p>
         </p:txBody>
       </p:sp>
@@ -5222,7 +5216,7 @@
           <p:cNvPr id="5" name="テキスト ボックス 4">
             <a:extLst>
               <a:ext uri="{FF2B5EF4-FFF2-40B4-BE49-F238E27FC236}">
-                <a16:creationId xmlns:a16="http://schemas.microsoft.com/office/drawing/2014/main" id="{DACCC52E-E190-F779-32FD-3520E13CD6EF}"/>
+                <a16:creationId xmlns:a16="http://schemas.microsoft.com/office/drawing/2014/main" id="{284D7D47-8D67-862C-C1CB-D07D27034555}"/>
               </a:ext>
             </a:extLst>
           </p:cNvPr>
@@ -5269,7 +5263,7 @@
             <a:hlinkClick r:id="" action="ppaction://media"/>
             <a:extLst>
               <a:ext uri="{FF2B5EF4-FFF2-40B4-BE49-F238E27FC236}">
-                <a16:creationId xmlns:a16="http://schemas.microsoft.com/office/drawing/2014/main" id="{E2A72A59-74D4-F6DD-D875-6E912CE3EA3D}"/>
+                <a16:creationId xmlns:a16="http://schemas.microsoft.com/office/drawing/2014/main" id="{F699742C-3685-A990-3E12-2C3A949A89E1}"/>
               </a:ext>
             </a:extLst>
           </p:cNvPr>
@@ -5304,7 +5298,7 @@
     </p:spTree>
     <p:extLst>
       <p:ext uri="{BB962C8B-B14F-4D97-AF65-F5344CB8AC3E}">
-        <p14:creationId xmlns:p14="http://schemas.microsoft.com/office/powerpoint/2010/main" val="2853462024"/>
+        <p14:creationId xmlns:p14="http://schemas.microsoft.com/office/powerpoint/2010/main" val="3850802491"/>
       </p:ext>
     </p:extLst>
   </p:cSld>
@@ -5313,10 +5307,10 @@
   </p:clrMapOvr>
   <mc:AlternateContent xmlns:mc="http://schemas.openxmlformats.org/markup-compatibility/2006">
     <mc:Choice xmlns:p14="http://schemas.microsoft.com/office/powerpoint/2010/main" Requires="p14">
-      <p:transition spd="slow" p14:dur="2000" advTm="6000"/>
+      <p:transition spd="slow" p14:dur="2000" advTm="7000"/>
     </mc:Choice>
     <mc:Fallback>
-      <p:transition spd="slow" advTm="6000"/>
+      <p:transition spd="slow" advTm="7000"/>
     </mc:Fallback>
   </mc:AlternateContent>
   <p:timing>
@@ -5347,7 +5341,7 @@
                                   <p:childTnLst>
                                     <p:cmd type="call" cmd="playFrom(0.0)">
                                       <p:cBhvr>
-                                        <p:cTn id="6" dur="5982" fill="hold"/>
+                                        <p:cTn id="6" dur="6076" fill="hold"/>
                                         <p:tgtEl>
                                           <p:spTgt spid="6"/>
                                         </p:tgtEl>
@@ -5428,7 +5422,7 @@
           <p:cNvPr id="2" name="テキスト ボックス 1">
             <a:extLst>
               <a:ext uri="{FF2B5EF4-FFF2-40B4-BE49-F238E27FC236}">
-                <a16:creationId xmlns:a16="http://schemas.microsoft.com/office/drawing/2014/main" id="{8464433E-70BA-4E3F-0E12-10EE520ACEDE}"/>
+                <a16:creationId xmlns:a16="http://schemas.microsoft.com/office/drawing/2014/main" id="{FC35B799-C36B-6192-8384-A94C75D4FF96}"/>
               </a:ext>
             </a:extLst>
           </p:cNvPr>
@@ -5474,7 +5468,7 @@
           <p:cNvPr id="3" name="テキスト ボックス 2">
             <a:extLst>
               <a:ext uri="{FF2B5EF4-FFF2-40B4-BE49-F238E27FC236}">
-                <a16:creationId xmlns:a16="http://schemas.microsoft.com/office/drawing/2014/main" id="{20F75D29-517B-2D62-5B7E-29FD23954DEA}"/>
+                <a16:creationId xmlns:a16="http://schemas.microsoft.com/office/drawing/2014/main" id="{F504FB44-B9AF-B32A-EBB2-2ABBF335E5F4}"/>
               </a:ext>
             </a:extLst>
           </p:cNvPr>
@@ -5514,7 +5508,7 @@
           <p:cNvPr id="4" name="テキスト ボックス 3">
             <a:extLst>
               <a:ext uri="{FF2B5EF4-FFF2-40B4-BE49-F238E27FC236}">
-                <a16:creationId xmlns:a16="http://schemas.microsoft.com/office/drawing/2014/main" id="{88DCC3ED-6A34-34EF-6EE6-E1DA8DE93347}"/>
+                <a16:creationId xmlns:a16="http://schemas.microsoft.com/office/drawing/2014/main" id="{D88324C3-C1BA-F994-5424-3926E1A8F547}"/>
               </a:ext>
             </a:extLst>
           </p:cNvPr>
@@ -5579,7 +5573,7 @@
           <p:cNvPr id="5" name="テキスト ボックス 4">
             <a:extLst>
               <a:ext uri="{FF2B5EF4-FFF2-40B4-BE49-F238E27FC236}">
-                <a16:creationId xmlns:a16="http://schemas.microsoft.com/office/drawing/2014/main" id="{5EE0032A-764A-6B07-F126-0501AB1B0A55}"/>
+                <a16:creationId xmlns:a16="http://schemas.microsoft.com/office/drawing/2014/main" id="{18E128E6-4521-6C25-3AC2-714BA6628BA8}"/>
               </a:ext>
             </a:extLst>
           </p:cNvPr>
@@ -5626,7 +5620,7 @@
             <a:hlinkClick r:id="" action="ppaction://media"/>
             <a:extLst>
               <a:ext uri="{FF2B5EF4-FFF2-40B4-BE49-F238E27FC236}">
-                <a16:creationId xmlns:a16="http://schemas.microsoft.com/office/drawing/2014/main" id="{330CCF8F-DF1D-7AA7-9D81-1DB58E737811}"/>
+                <a16:creationId xmlns:a16="http://schemas.microsoft.com/office/drawing/2014/main" id="{84717F0E-BC51-7523-59D3-B45AF1DD1599}"/>
               </a:ext>
             </a:extLst>
           </p:cNvPr>
@@ -5661,7 +5655,7 @@
     </p:spTree>
     <p:extLst>
       <p:ext uri="{BB962C8B-B14F-4D97-AF65-F5344CB8AC3E}">
-        <p14:creationId xmlns:p14="http://schemas.microsoft.com/office/powerpoint/2010/main" val="1550441332"/>
+        <p14:creationId xmlns:p14="http://schemas.microsoft.com/office/powerpoint/2010/main" val="3194211999"/>
       </p:ext>
     </p:extLst>
   </p:cSld>
